--- a/模版.pptx
+++ b/模版.pptx
@@ -3648,41 +3648,6 @@
       <p:grpSpPr/>
       <p:sp>
         <p:nvSpPr>
-          <p:cNvPr id="2" name="标题 1"/>
-          <p:cNvSpPr>
-            <a:spLocks noGrp="1"/>
-          </p:cNvSpPr>
-          <p:nvPr>
-            <p:ph type="ctrTitle"/>
-            <p:custDataLst>
-              <p:tags r:id="rId1"/>
-            </p:custDataLst>
-          </p:nvPr>
-        </p:nvSpPr>
-        <p:spPr/>
-        <p:txBody>
-          <a:bodyPr>
-            <a:normAutofit/>
-          </a:bodyPr>
-          <a:p>
-            <a:r>
-              <a:rPr lang="zh-CN" altLang="en-US">
-                <a:latin typeface="微软雅黑" panose="020B0503020204020204" charset="-122"/>
-                <a:ea typeface="微软雅黑" panose="020B0503020204020204" charset="-122"/>
-                <a:cs typeface="微软雅黑" panose="020B0503020204020204" charset="-122"/>
-              </a:rPr>
-              <a:t>觉醒领导力</a:t>
-            </a:r>
-            <a:endParaRPr lang="zh-CN" altLang="en-US">
-              <a:latin typeface="微软雅黑" panose="020B0503020204020204" charset="-122"/>
-              <a:ea typeface="微软雅黑" panose="020B0503020204020204" charset="-122"/>
-              <a:cs typeface="微软雅黑" panose="020B0503020204020204" charset="-122"/>
-            </a:endParaRPr>
-          </a:p>
-        </p:txBody>
-      </p:sp>
-      <p:sp>
-        <p:nvSpPr>
           <p:cNvPr id="3" name="副标题 2"/>
           <p:cNvSpPr>
             <a:spLocks noGrp="1"/>
@@ -3690,7 +3655,7 @@
           <p:nvPr>
             <p:ph type="subTitle" idx="1"/>
             <p:custDataLst>
-              <p:tags r:id="rId2"/>
+              <p:tags r:id="rId1"/>
             </p:custDataLst>
           </p:nvPr>
         </p:nvSpPr>
@@ -3705,27 +3670,99 @@
                 <a:cs typeface="微软雅黑" panose="020B0503020204020204" charset="-122"/>
                 <a:sym typeface="+mn-ea"/>
               </a:rPr>
-              <a:t>-约翰</a:t>
+              <a:t>【文档关键字[副标题]】</a:t>
             </a:r>
+            <a:endParaRPr lang="zh-CN" altLang="en-US">
+              <a:latin typeface="微软雅黑" panose="020B0503020204020204" charset="-122"/>
+              <a:ea typeface="微软雅黑" panose="020B0503020204020204" charset="-122"/>
+              <a:cs typeface="微软雅黑" panose="020B0503020204020204" charset="-122"/>
+              <a:sym typeface="+mn-ea"/>
+            </a:endParaRPr>
+          </a:p>
+        </p:txBody>
+      </p:sp>
+      <p:sp>
+        <p:nvSpPr>
+          <p:cNvPr id="4" name="文本框 3"/>
+          <p:cNvSpPr txBox="1"/>
+          <p:nvPr/>
+        </p:nvSpPr>
+        <p:spPr>
+          <a:xfrm>
+            <a:off x="548005" y="840740"/>
+            <a:ext cx="8044180" cy="2302510"/>
+          </a:xfrm>
+          <a:prstGeom prst="rect">
+            <a:avLst/>
+          </a:prstGeom>
+          <a:noFill/>
+        </p:spPr>
+        <p:txBody>
+          <a:bodyPr wrap="square" rtlCol="0" anchor="b" anchorCtr="1">
+            <a:normAutofit fontScale="90000"/>
+          </a:bodyPr>
+          <a:p>
+            <a:pPr algn="l"/>
             <a:r>
-              <a:rPr lang="en-US" altLang="zh-CN">
+              <a:rPr lang="zh-CN" altLang="en-US" sz="7100" b="1">
+                <a:ln>
+                  <a:solidFill>
+                    <a:schemeClr val="accent1"/>
+                  </a:solidFill>
+                </a:ln>
+                <a:solidFill>
+                  <a:srgbClr val="B17453"/>
+                </a:solidFill>
                 <a:latin typeface="微软雅黑" panose="020B0503020204020204" charset="-122"/>
                 <a:ea typeface="微软雅黑" panose="020B0503020204020204" charset="-122"/>
                 <a:cs typeface="微软雅黑" panose="020B0503020204020204" charset="-122"/>
                 <a:sym typeface="+mn-ea"/>
               </a:rPr>
-              <a:t>·</a:t>
+              <a:t>【文</a:t>
             </a:r>
             <a:r>
-              <a:rPr lang="zh-CN" altLang="en-US">
+              <a:rPr lang="zh-CN" altLang="en-US" sz="7100" b="1">
+                <a:ln>
+                  <a:solidFill>
+                    <a:schemeClr val="accent1"/>
+                  </a:solidFill>
+                </a:ln>
+                <a:solidFill>
+                  <a:srgbClr val="B17453"/>
+                </a:solidFill>
                 <a:latin typeface="微软雅黑" panose="020B0503020204020204" charset="-122"/>
                 <a:ea typeface="微软雅黑" panose="020B0503020204020204" charset="-122"/>
                 <a:cs typeface="微软雅黑" panose="020B0503020204020204" charset="-122"/>
                 <a:sym typeface="+mn-ea"/>
               </a:rPr>
-              <a:t>麦基</a:t>
+              <a:t>档关键字[标题]</a:t>
             </a:r>
-            <a:endParaRPr lang="zh-CN" altLang="en-US">
+            <a:r>
+              <a:rPr lang="zh-CN" altLang="en-US" sz="7100" b="1">
+                <a:ln>
+                  <a:solidFill>
+                    <a:schemeClr val="accent1"/>
+                  </a:solidFill>
+                </a:ln>
+                <a:solidFill>
+                  <a:srgbClr val="B17453"/>
+                </a:solidFill>
+                <a:latin typeface="微软雅黑" panose="020B0503020204020204" charset="-122"/>
+                <a:ea typeface="微软雅黑" panose="020B0503020204020204" charset="-122"/>
+                <a:cs typeface="微软雅黑" panose="020B0503020204020204" charset="-122"/>
+                <a:sym typeface="+mn-ea"/>
+              </a:rPr>
+              <a:t>】</a:t>
+            </a:r>
+            <a:endParaRPr lang="en-US" altLang="zh-CN" sz="7100" b="1">
+              <a:ln>
+                <a:solidFill>
+                  <a:schemeClr val="accent1"/>
+                </a:solidFill>
+              </a:ln>
+              <a:solidFill>
+                <a:srgbClr val="B17453"/>
+              </a:solidFill>
               <a:latin typeface="微软雅黑" panose="020B0503020204020204" charset="-122"/>
               <a:ea typeface="微软雅黑" panose="020B0503020204020204" charset="-122"/>
               <a:cs typeface="微软雅黑" panose="020B0503020204020204" charset="-122"/>
@@ -4020,26 +4057,6 @@
 </file>
 
 <file path=ppt/tags/tag24.xml><?xml version="1.0" encoding="utf-8"?>
-<p:tagLst xmlns:p="http://schemas.openxmlformats.org/presentationml/2006/main">
-  <p:tag name="KSO_WM_UNIT_TYPE" val="a"/>
-  <p:tag name="KSO_WM_UNIT_INDEX" val="1"/>
-  <p:tag name="KSO_WM_BEAUTIFY_FLAG" val="#wm#"/>
-  <p:tag name="KSO_WM_TAG_VERSION" val="3.0"/>
-  <p:tag name="KSO_WM_UNIT_PRESET_TEXT" val="单击编辑母版标题"/>
-  <p:tag name="KSO_WM_UNIT_ID" val="_1*a*1"/>
-  <p:tag name="KSO_WM_UNIT_ISNUMDGMTITLE" val="0"/>
-  <p:tag name="KSO_WM_UNIT_NOCLEAR" val="0"/>
-  <p:tag name="KSO_WM_UNIT_HIGHLIGHT" val="0"/>
-  <p:tag name="KSO_WM_UNIT_COMPATIBLE" val="0"/>
-  <p:tag name="KSO_WM_UNIT_DIAGRAM_ISNUMVISUAL" val="0"/>
-  <p:tag name="KSO_WM_UNIT_DIAGRAM_ISREFERUNIT" val="0"/>
-  <p:tag name="KSO_WM_UNIT_LAYERLEVEL" val="1"/>
-  <p:tag name="KSO_WM_UNIT_ISCONTENTSTITLE" val="0"/>
-  <p:tag name="KSO_WM_UNIT_VALUE" val="10"/>
-</p:tagLst>
-</file>
-
-<file path=ppt/tags/tag25.xml><?xml version="1.0" encoding="utf-8"?>
 <p:tagLst xmlns:p="http://schemas.openxmlformats.org/presentationml/2006/main">
   <p:tag name="KSO_WM_UNIT_TYPE" val="b"/>
   <p:tag name="KSO_WM_UNIT_INDEX" val="1"/>

--- a/模版.pptx
+++ b/模版.pptx
@@ -1030,113 +1030,6 @@
       </p:sp>
       <p:sp>
         <p:nvSpPr>
-          <p:cNvPr id="4" name="日期占位符 3"/>
-          <p:cNvSpPr>
-            <a:spLocks noGrp="1"/>
-          </p:cNvSpPr>
-          <p:nvPr>
-            <p:ph type="dt" sz="half" idx="10"/>
-            <p:custDataLst>
-              <p:tags r:id="rId7"/>
-            </p:custDataLst>
-          </p:nvPr>
-        </p:nvSpPr>
-        <p:spPr/>
-        <p:txBody>
-          <a:bodyPr wrap="square">
-            <a:normAutofit/>
-          </a:bodyPr>
-          <a:lstStyle>
-            <a:lvl1pPr>
-              <a:defRPr>
-                <a:latin typeface="汉仪古隶简" panose="00020600040101010101" charset="-122"/>
-                <a:ea typeface="汉仪古隶简" panose="00020600040101010101" charset="-122"/>
-                <a:sym typeface="汉仪古隶简" panose="00020600040101010101" charset="-122"/>
-              </a:defRPr>
-            </a:lvl1pPr>
-          </a:lstStyle>
-          <a:p>
-            <a:fld id="{5592522B-0F24-4480-B9DD-A9474A6880D6}" type="datetimeFigureOut">
-              <a:rPr lang="zh-CN" altLang="en-US" smtClean="0"/>
-            </a:fld>
-            <a:endParaRPr lang="zh-CN" altLang="en-US"/>
-          </a:p>
-        </p:txBody>
-      </p:sp>
-      <p:sp>
-        <p:nvSpPr>
-          <p:cNvPr id="5" name="页脚占位符 4"/>
-          <p:cNvSpPr>
-            <a:spLocks noGrp="1"/>
-          </p:cNvSpPr>
-          <p:nvPr>
-            <p:ph type="ftr" sz="quarter" idx="11"/>
-            <p:custDataLst>
-              <p:tags r:id="rId8"/>
-            </p:custDataLst>
-          </p:nvPr>
-        </p:nvSpPr>
-        <p:spPr/>
-        <p:txBody>
-          <a:bodyPr>
-            <a:normAutofit/>
-          </a:bodyPr>
-          <a:lstStyle>
-            <a:lvl1pPr>
-              <a:defRPr>
-                <a:latin typeface="汉仪古隶简" panose="00020600040101010101" charset="-122"/>
-                <a:ea typeface="汉仪古隶简" panose="00020600040101010101" charset="-122"/>
-                <a:sym typeface="汉仪古隶简" panose="00020600040101010101" charset="-122"/>
-              </a:defRPr>
-            </a:lvl1pPr>
-          </a:lstStyle>
-          <a:p>
-            <a:endParaRPr lang="zh-CN" altLang="en-US" dirty="0"/>
-          </a:p>
-        </p:txBody>
-      </p:sp>
-      <p:sp>
-        <p:nvSpPr>
-          <p:cNvPr id="6" name="灯片编号占位符 5"/>
-          <p:cNvSpPr>
-            <a:spLocks noGrp="1"/>
-          </p:cNvSpPr>
-          <p:nvPr>
-            <p:ph type="sldNum" sz="quarter" idx="12"/>
-            <p:custDataLst>
-              <p:tags r:id="rId9"/>
-            </p:custDataLst>
-          </p:nvPr>
-        </p:nvSpPr>
-        <p:spPr>
-          <a:xfrm>
-            <a:off x="6457950" y="8475133"/>
-            <a:ext cx="2057400" cy="486833"/>
-          </a:xfrm>
-        </p:spPr>
-        <p:txBody>
-          <a:bodyPr wrap="square">
-            <a:normAutofit/>
-          </a:bodyPr>
-          <a:lstStyle>
-            <a:lvl1pPr>
-              <a:defRPr>
-                <a:latin typeface="汉仪古隶简" panose="00020600040101010101" charset="-122"/>
-                <a:ea typeface="汉仪古隶简" panose="00020600040101010101" charset="-122"/>
-                <a:sym typeface="汉仪古隶简" panose="00020600040101010101" charset="-122"/>
-              </a:defRPr>
-            </a:lvl1pPr>
-          </a:lstStyle>
-          <a:p>
-            <a:fld id="{BE5F26B5-172A-4DC2-B0B7-181CFC56B87C}" type="slidenum">
-              <a:rPr lang="zh-CN" altLang="en-US" smtClean="0"/>
-            </a:fld>
-            <a:endParaRPr lang="zh-CN" altLang="en-US"/>
-          </a:p>
-        </p:txBody>
-      </p:sp>
-      <p:sp>
-        <p:nvSpPr>
           <p:cNvPr id="2" name="标题 1"/>
           <p:cNvSpPr>
             <a:spLocks noGrp="1"/>
@@ -1144,7 +1037,7 @@
           <p:nvPr>
             <p:ph type="ctrTitle" hasCustomPrompt="1"/>
             <p:custDataLst>
-              <p:tags r:id="rId10"/>
+              <p:tags r:id="rId7"/>
             </p:custDataLst>
           </p:nvPr>
         </p:nvSpPr>
@@ -1204,7 +1097,7 @@
           <p:nvPr>
             <p:ph type="subTitle" idx="1" hasCustomPrompt="1"/>
             <p:custDataLst>
-              <p:tags r:id="rId11"/>
+              <p:tags r:id="rId8"/>
             </p:custDataLst>
           </p:nvPr>
         </p:nvSpPr>
@@ -1283,7 +1176,7 @@
           <p:cNvSpPr/>
           <p:nvPr userDrawn="1">
             <p:custDataLst>
-              <p:tags r:id="rId12"/>
+              <p:tags r:id="rId9"/>
             </p:custDataLst>
           </p:nvPr>
         </p:nvSpPr>
@@ -1366,7 +1259,7 @@
           <p:cNvSpPr/>
           <p:nvPr userDrawn="1">
             <p:custDataLst>
-              <p:tags r:id="rId13"/>
+              <p:tags r:id="rId10"/>
             </p:custDataLst>
           </p:nvPr>
         </p:nvSpPr>
@@ -1501,87 +1394,13 @@
           </a:p>
         </p:txBody>
       </p:sp>
-      <p:pic>
-        <p:nvPicPr>
-          <p:cNvPr id="8" name="图片 7" descr="生成海报"/>
-          <p:cNvPicPr>
-            <a:picLocks noChangeAspect="1"/>
-          </p:cNvPicPr>
-          <p:nvPr userDrawn="1">
-            <p:custDataLst>
-              <p:tags r:id="rId14"/>
-            </p:custDataLst>
-          </p:nvPr>
-        </p:nvPicPr>
-        <p:blipFill>
-          <a:blip r:embed="rId15" cstate="email">
-            <a:lum bright="6000"/>
-          </a:blip>
-          <a:srcRect/>
-          <a:stretch>
-            <a:fillRect/>
-          </a:stretch>
-        </p:blipFill>
-        <p:spPr>
-          <a:xfrm>
-            <a:off x="0" y="5899573"/>
-            <a:ext cx="9141714" cy="3244427"/>
-          </a:xfrm>
-          <a:custGeom>
-            <a:avLst/>
-            <a:gdLst>
-              <a:gd name="connsiteX0" fmla="*/ 0 w 12188952"/>
-              <a:gd name="connsiteY0" fmla="*/ 0 h 2433320"/>
-              <a:gd name="connsiteX1" fmla="*/ 12188952 w 12188952"/>
-              <a:gd name="connsiteY1" fmla="*/ 0 h 2433320"/>
-              <a:gd name="connsiteX2" fmla="*/ 12188952 w 12188952"/>
-              <a:gd name="connsiteY2" fmla="*/ 2433320 h 2433320"/>
-              <a:gd name="connsiteX3" fmla="*/ 0 w 12188952"/>
-              <a:gd name="connsiteY3" fmla="*/ 2433320 h 2433320"/>
-            </a:gdLst>
-            <a:ahLst/>
-            <a:cxnLst>
-              <a:cxn ang="0">
-                <a:pos x="connsiteX0" y="connsiteY0"/>
-              </a:cxn>
-              <a:cxn ang="0">
-                <a:pos x="connsiteX1" y="connsiteY1"/>
-              </a:cxn>
-              <a:cxn ang="0">
-                <a:pos x="connsiteX2" y="connsiteY2"/>
-              </a:cxn>
-              <a:cxn ang="0">
-                <a:pos x="connsiteX3" y="connsiteY3"/>
-              </a:cxn>
-            </a:cxnLst>
-            <a:rect l="l" t="t" r="r" b="b"/>
-            <a:pathLst>
-              <a:path w="12188952" h="2433320">
-                <a:moveTo>
-                  <a:pt x="0" y="0"/>
-                </a:moveTo>
-                <a:lnTo>
-                  <a:pt x="12188952" y="0"/>
-                </a:lnTo>
-                <a:lnTo>
-                  <a:pt x="12188952" y="2433320"/>
-                </a:lnTo>
-                <a:lnTo>
-                  <a:pt x="0" y="2433320"/>
-                </a:lnTo>
-                <a:close/>
-              </a:path>
-            </a:pathLst>
-          </a:custGeom>
-        </p:spPr>
-      </p:pic>
       <p:sp>
         <p:nvSpPr>
           <p:cNvPr id="7" name="任意多边形: 形状 2"/>
           <p:cNvSpPr/>
           <p:nvPr userDrawn="1">
             <p:custDataLst>
-              <p:tags r:id="rId16"/>
+              <p:tags r:id="rId11"/>
             </p:custDataLst>
           </p:nvPr>
         </p:nvSpPr>
@@ -1795,853 +1614,6 @@
               <a:ea typeface="汉仪古隶简" panose="00020600040101010101" charset="-122"/>
               <a:cs typeface="+mn-cs"/>
               <a:sym typeface="汉仪古隶简" panose="00020600040101010101" charset="-122"/>
-            </a:endParaRPr>
-          </a:p>
-        </p:txBody>
-      </p:sp>
-      <p:sp>
-        <p:nvSpPr>
-          <p:cNvPr id="9" name="任意多边形: 形状 13"/>
-          <p:cNvSpPr/>
-          <p:nvPr userDrawn="1">
-            <p:custDataLst>
-              <p:tags r:id="rId17"/>
-            </p:custDataLst>
-          </p:nvPr>
-        </p:nvSpPr>
-        <p:spPr>
-          <a:xfrm flipH="1">
-            <a:off x="7117871" y="4359996"/>
-            <a:ext cx="1950388" cy="1509239"/>
-          </a:xfrm>
-          <a:custGeom>
-            <a:avLst/>
-            <a:gdLst>
-              <a:gd name="connsiteX0" fmla="*/ 226049 w 1658514"/>
-              <a:gd name="connsiteY0" fmla="*/ 4 h 721903"/>
-              <a:gd name="connsiteX1" fmla="*/ 78983 w 1658514"/>
-              <a:gd name="connsiteY1" fmla="*/ 114208 h 721903"/>
-              <a:gd name="connsiteX2" fmla="*/ 502846 w 1658514"/>
-              <a:gd name="connsiteY2" fmla="*/ 205172 h 721903"/>
-              <a:gd name="connsiteX3" fmla="*/ 1296469 w 1658514"/>
-              <a:gd name="connsiteY3" fmla="*/ 358048 h 721903"/>
-              <a:gd name="connsiteX4" fmla="*/ 1120351 w 1658514"/>
-              <a:gd name="connsiteY4" fmla="*/ 510925 h 721903"/>
-              <a:gd name="connsiteX5" fmla="*/ 1010052 w 1658514"/>
-              <a:gd name="connsiteY5" fmla="*/ 570932 h 721903"/>
-              <a:gd name="connsiteX6" fmla="*/ 1236556 w 1658514"/>
-              <a:gd name="connsiteY6" fmla="*/ 661896 h 721903"/>
-              <a:gd name="connsiteX7" fmla="*/ 1658514 w 1658514"/>
-              <a:gd name="connsiteY7" fmla="*/ 721904 h 721903"/>
-              <a:gd name="connsiteX8" fmla="*/ 1426199 w 1658514"/>
-              <a:gd name="connsiteY8" fmla="*/ 679327 h 721903"/>
-              <a:gd name="connsiteX9" fmla="*/ 928708 w 1658514"/>
-              <a:gd name="connsiteY9" fmla="*/ 648371 h 721903"/>
-              <a:gd name="connsiteX10" fmla="*/ 998431 w 1658514"/>
-              <a:gd name="connsiteY10" fmla="*/ 470253 h 721903"/>
-              <a:gd name="connsiteX11" fmla="*/ 1161023 w 1658514"/>
-              <a:gd name="connsiteY11" fmla="*/ 365764 h 721903"/>
-              <a:gd name="connsiteX12" fmla="*/ 615145 w 1658514"/>
-              <a:gd name="connsiteY12" fmla="*/ 247654 h 721903"/>
-              <a:gd name="connsiteX13" fmla="*/ 11260 w 1658514"/>
-              <a:gd name="connsiteY13" fmla="*/ 177931 h 721903"/>
-              <a:gd name="connsiteX14" fmla="*/ 226049 w 1658514"/>
-              <a:gd name="connsiteY14" fmla="*/ 4 h 721903"/>
-            </a:gdLst>
-            <a:ahLst/>
-            <a:cxnLst>
-              <a:cxn ang="0">
-                <a:pos x="connsiteX0" y="connsiteY0"/>
-              </a:cxn>
-              <a:cxn ang="0">
-                <a:pos x="connsiteX1" y="connsiteY1"/>
-              </a:cxn>
-              <a:cxn ang="0">
-                <a:pos x="connsiteX2" y="connsiteY2"/>
-              </a:cxn>
-              <a:cxn ang="0">
-                <a:pos x="connsiteX3" y="connsiteY3"/>
-              </a:cxn>
-              <a:cxn ang="0">
-                <a:pos x="connsiteX4" y="connsiteY4"/>
-              </a:cxn>
-              <a:cxn ang="0">
-                <a:pos x="connsiteX5" y="connsiteY5"/>
-              </a:cxn>
-              <a:cxn ang="0">
-                <a:pos x="connsiteX6" y="connsiteY6"/>
-              </a:cxn>
-              <a:cxn ang="0">
-                <a:pos x="connsiteX7" y="connsiteY7"/>
-              </a:cxn>
-              <a:cxn ang="0">
-                <a:pos x="connsiteX8" y="connsiteY8"/>
-              </a:cxn>
-              <a:cxn ang="0">
-                <a:pos x="connsiteX9" y="connsiteY9"/>
-              </a:cxn>
-              <a:cxn ang="0">
-                <a:pos x="connsiteX10" y="connsiteY10"/>
-              </a:cxn>
-              <a:cxn ang="0">
-                <a:pos x="connsiteX11" y="connsiteY11"/>
-              </a:cxn>
-              <a:cxn ang="0">
-                <a:pos x="connsiteX12" y="connsiteY12"/>
-              </a:cxn>
-              <a:cxn ang="0">
-                <a:pos x="connsiteX13" y="connsiteY13"/>
-              </a:cxn>
-              <a:cxn ang="0">
-                <a:pos x="connsiteX14" y="connsiteY14"/>
-              </a:cxn>
-            </a:cxnLst>
-            <a:rect l="l" t="t" r="r" b="b"/>
-            <a:pathLst>
-              <a:path w="1658514" h="721903">
-                <a:moveTo>
-                  <a:pt x="226049" y="4"/>
-                </a:moveTo>
-                <a:cubicBezTo>
-                  <a:pt x="235955" y="-282"/>
-                  <a:pt x="63457" y="15530"/>
-                  <a:pt x="78983" y="114208"/>
-                </a:cubicBezTo>
-                <a:cubicBezTo>
-                  <a:pt x="94509" y="212888"/>
-                  <a:pt x="286057" y="207077"/>
-                  <a:pt x="502846" y="205172"/>
-                </a:cubicBezTo>
-                <a:cubicBezTo>
-                  <a:pt x="719635" y="203267"/>
-                  <a:pt x="1232556" y="183836"/>
-                  <a:pt x="1296469" y="358048"/>
-                </a:cubicBezTo>
-                <a:cubicBezTo>
-                  <a:pt x="1342189" y="482731"/>
-                  <a:pt x="1189979" y="512925"/>
-                  <a:pt x="1120351" y="510925"/>
-                </a:cubicBezTo>
-                <a:cubicBezTo>
-                  <a:pt x="1066059" y="509401"/>
-                  <a:pt x="1010052" y="522545"/>
-                  <a:pt x="1010052" y="570932"/>
-                </a:cubicBezTo>
-                <a:cubicBezTo>
-                  <a:pt x="1010052" y="619319"/>
-                  <a:pt x="1101016" y="654181"/>
-                  <a:pt x="1236556" y="661896"/>
-                </a:cubicBezTo>
-                <a:cubicBezTo>
-                  <a:pt x="1372002" y="669611"/>
-                  <a:pt x="1588791" y="661896"/>
-                  <a:pt x="1658514" y="721904"/>
-                </a:cubicBezTo>
-                <a:cubicBezTo>
-                  <a:pt x="1658514" y="721904"/>
-                  <a:pt x="1567550" y="683232"/>
-                  <a:pt x="1426199" y="679327"/>
-                </a:cubicBezTo>
-                <a:cubicBezTo>
-                  <a:pt x="1292659" y="675707"/>
-                  <a:pt x="1017767" y="704473"/>
-                  <a:pt x="928708" y="648371"/>
-                </a:cubicBezTo>
-                <a:cubicBezTo>
-                  <a:pt x="839650" y="592268"/>
-                  <a:pt x="888037" y="470253"/>
-                  <a:pt x="998431" y="470253"/>
-                </a:cubicBezTo>
-                <a:cubicBezTo>
-                  <a:pt x="1108826" y="470253"/>
-                  <a:pt x="1185502" y="437868"/>
-                  <a:pt x="1161023" y="365764"/>
-                </a:cubicBezTo>
-                <a:cubicBezTo>
-                  <a:pt x="1122352" y="251559"/>
-                  <a:pt x="826124" y="241844"/>
-                  <a:pt x="615145" y="247654"/>
-                </a:cubicBezTo>
-                <a:cubicBezTo>
-                  <a:pt x="404167" y="253464"/>
-                  <a:pt x="65458" y="303756"/>
-                  <a:pt x="11260" y="177931"/>
-                </a:cubicBezTo>
-                <a:cubicBezTo>
-                  <a:pt x="-42937" y="52106"/>
-                  <a:pt x="109939" y="3909"/>
-                  <a:pt x="226049" y="4"/>
-                </a:cubicBezTo>
-                <a:close/>
-              </a:path>
-            </a:pathLst>
-          </a:custGeom>
-          <a:gradFill>
-            <a:gsLst>
-              <a:gs pos="20000">
-                <a:schemeClr val="accent1">
-                  <a:lumMod val="20000"/>
-                  <a:lumOff val="80000"/>
-                </a:schemeClr>
-              </a:gs>
-              <a:gs pos="100000">
-                <a:schemeClr val="accent1">
-                  <a:lumMod val="10000"/>
-                  <a:lumOff val="90000"/>
-                </a:schemeClr>
-              </a:gs>
-            </a:gsLst>
-            <a:lin ang="5400000" scaled="1"/>
-          </a:gradFill>
-          <a:ln w="2858" cap="rnd">
-            <a:noFill/>
-            <a:prstDash val="solid"/>
-            <a:round/>
-          </a:ln>
-        </p:spPr>
-        <p:txBody>
-          <a:bodyPr rtlCol="0" anchor="ctr">
-            <a:noAutofit/>
-          </a:bodyPr>
-          <a:lstStyle/>
-          <a:p>
-            <a:pPr lvl="0" algn="l" defTabSz="914400">
-              <a:spcBef>
-                <a:spcPct val="0"/>
-              </a:spcBef>
-              <a:spcAft>
-                <a:spcPct val="0"/>
-              </a:spcAft>
-              <a:buClrTx/>
-              <a:buSzTx/>
-              <a:buFontTx/>
-            </a:pPr>
-            <a:endParaRPr lang="zh-CN" altLang="en-US" sz="1350" kern="1200" dirty="0">
-              <a:solidFill>
-                <a:schemeClr val="tx1"/>
-              </a:solidFill>
-              <a:latin typeface="汉仪古隶简" panose="00020600040101010101" charset="-122"/>
-              <a:ea typeface="汉仪古隶简" panose="00020600040101010101" charset="-122"/>
-              <a:cs typeface="+mn-cs"/>
-              <a:sym typeface="汉仪古隶简" panose="00020600040101010101" charset="-122"/>
-            </a:endParaRPr>
-          </a:p>
-        </p:txBody>
-      </p:sp>
-      <p:sp>
-        <p:nvSpPr>
-          <p:cNvPr id="20" name="AutoShape 20"/>
-          <p:cNvSpPr/>
-          <p:nvPr userDrawn="1"/>
-        </p:nvSpPr>
-        <p:spPr>
-          <a:xfrm>
-            <a:off x="3810" y="6369050"/>
-            <a:ext cx="9143365" cy="435610"/>
-          </a:xfrm>
-          <a:prstGeom prst="rect">
-            <a:avLst/>
-          </a:prstGeom>
-          <a:noFill/>
-          <a:ln w="12700" cap="flat" cmpd="sng">
-            <a:noFill/>
-            <a:prstDash val="solid"/>
-            <a:round/>
-          </a:ln>
-        </p:spPr>
-        <p:txBody>
-          <a:bodyPr vert="horz" wrap="square" lIns="0" tIns="0" rIns="0" bIns="0" rtlCol="0" anchor="ctr" anchorCtr="0"/>
-          <a:p>
-            <a:pPr indent="0" algn="ctr" defTabSz="914400">
-              <a:lnSpc>
-                <a:spcPct val="125000"/>
-              </a:lnSpc>
-              <a:spcBef>
-                <a:spcPts val="0"/>
-              </a:spcBef>
-              <a:spcAft>
-                <a:spcPts val="0"/>
-              </a:spcAft>
-              <a:defRPr/>
-            </a:pPr>
-            <a:r>
-              <a:rPr lang="en-US" sz="1800" b="0" i="0" u="none" strike="noStrike" kern="0">
-                <a:solidFill>
-                  <a:schemeClr val="tx1"/>
-                </a:solidFill>
-                <a:latin typeface="Noto Sans SC" panose="020B0200000000000000" charset="-122"/>
-                <a:ea typeface="Noto Sans SC" panose="020B0200000000000000" charset="-122"/>
-                <a:cs typeface="Noto Sans SC" panose="020B0200000000000000" charset="-122"/>
-                <a:sym typeface="Noto Sans SC" panose="020B0200000000000000" charset="-122"/>
-              </a:rPr>
-              <a:t>发货方式：</a:t>
-            </a:r>
-            <a:r>
-              <a:rPr lang="zh-CN" altLang="en-US" sz="1800" b="0" i="0" u="none" strike="noStrike" kern="0">
-                <a:solidFill>
-                  <a:schemeClr val="tx1"/>
-                </a:solidFill>
-                <a:latin typeface="Noto Sans SC" panose="020B0200000000000000" charset="-122"/>
-                <a:ea typeface="Noto Sans SC" panose="020B0200000000000000" charset="-122"/>
-                <a:cs typeface="Noto Sans SC" panose="020B0200000000000000" charset="-122"/>
-                <a:sym typeface="Noto Sans SC" panose="020B0200000000000000" charset="-122"/>
-              </a:rPr>
-              <a:t>佰</a:t>
-            </a:r>
-            <a:r>
-              <a:rPr lang="en-US" sz="1800" b="0" i="0" u="none" strike="noStrike" kern="0">
-                <a:solidFill>
-                  <a:schemeClr val="tx1"/>
-                </a:solidFill>
-                <a:latin typeface="Noto Sans SC" panose="020B0200000000000000" charset="-122"/>
-                <a:ea typeface="Noto Sans SC" panose="020B0200000000000000" charset="-122"/>
-                <a:cs typeface="Noto Sans SC" panose="020B0200000000000000" charset="-122"/>
-                <a:sym typeface="Noto Sans SC" panose="020B0200000000000000" charset="-122"/>
-              </a:rPr>
-              <a:t>度网盘 / </a:t>
-            </a:r>
-            <a:r>
-              <a:rPr lang="zh-CN" altLang="en-US" sz="1800" b="0" i="0" u="none" strike="noStrike" kern="0">
-                <a:solidFill>
-                  <a:schemeClr val="tx1"/>
-                </a:solidFill>
-                <a:latin typeface="Noto Sans SC" panose="020B0200000000000000" charset="-122"/>
-                <a:ea typeface="Noto Sans SC" panose="020B0200000000000000" charset="-122"/>
-                <a:cs typeface="Noto Sans SC" panose="020B0200000000000000" charset="-122"/>
-                <a:sym typeface="Noto Sans SC" panose="020B0200000000000000" charset="-122"/>
-              </a:rPr>
-              <a:t>侉</a:t>
-            </a:r>
-            <a:r>
-              <a:rPr lang="en-US" sz="1800" b="0" i="0" u="none" strike="noStrike" kern="0">
-                <a:solidFill>
-                  <a:schemeClr val="tx1"/>
-                </a:solidFill>
-                <a:latin typeface="Noto Sans SC" panose="020B0200000000000000" charset="-122"/>
-                <a:ea typeface="Noto Sans SC" panose="020B0200000000000000" charset="-122"/>
-                <a:cs typeface="Noto Sans SC" panose="020B0200000000000000" charset="-122"/>
-                <a:sym typeface="Noto Sans SC" panose="020B0200000000000000" charset="-122"/>
-              </a:rPr>
-              <a:t>克网盘 秒发</a:t>
-            </a:r>
-            <a:endParaRPr lang="en-US" sz="1800" b="0" i="0" u="none" strike="noStrike" kern="0">
-              <a:solidFill>
-                <a:schemeClr val="tx1"/>
-              </a:solidFill>
-              <a:latin typeface="Noto Sans SC" panose="020B0200000000000000" charset="-122"/>
-              <a:ea typeface="Noto Sans SC" panose="020B0200000000000000" charset="-122"/>
-              <a:cs typeface="Noto Sans SC" panose="020B0200000000000000" charset="-122"/>
-              <a:sym typeface="Noto Sans SC" panose="020B0200000000000000" charset="-122"/>
-            </a:endParaRPr>
-          </a:p>
-        </p:txBody>
-      </p:sp>
-      <p:sp>
-        <p:nvSpPr>
-          <p:cNvPr id="18" name="AutoShape 18"/>
-          <p:cNvSpPr/>
-          <p:nvPr userDrawn="1"/>
-        </p:nvSpPr>
-        <p:spPr>
-          <a:xfrm>
-            <a:off x="3175" y="5685790"/>
-            <a:ext cx="9144000" cy="285750"/>
-          </a:xfrm>
-          <a:prstGeom prst="rect">
-            <a:avLst/>
-          </a:prstGeom>
-          <a:noFill/>
-          <a:ln w="12700" cap="flat" cmpd="sng">
-            <a:noFill/>
-            <a:prstDash val="solid"/>
-            <a:round/>
-          </a:ln>
-        </p:spPr>
-        <p:txBody>
-          <a:bodyPr vert="horz" wrap="square" lIns="0" tIns="0" rIns="0" bIns="0" rtlCol="0" anchor="ctr" anchorCtr="0"/>
-          <a:p>
-            <a:pPr indent="0" algn="ctr" defTabSz="914400">
-              <a:lnSpc>
-                <a:spcPct val="125000"/>
-              </a:lnSpc>
-              <a:spcBef>
-                <a:spcPts val="0"/>
-              </a:spcBef>
-              <a:spcAft>
-                <a:spcPts val="0"/>
-              </a:spcAft>
-              <a:defRPr/>
-            </a:pPr>
-            <a:r>
-              <a:rPr lang="en-US" sz="2800" b="1" i="0" u="none" strike="noStrike" kern="0">
-                <a:solidFill>
-                  <a:schemeClr val="tx1"/>
-                </a:solidFill>
-                <a:latin typeface="Noto Sans SC" panose="020B0200000000000000" charset="-122"/>
-                <a:ea typeface="Noto Sans SC" panose="020B0200000000000000" charset="-122"/>
-                <a:cs typeface="Noto Sans SC" panose="020B0200000000000000" charset="-122"/>
-                <a:sym typeface="Noto Sans SC" panose="020B0200000000000000" charset="-122"/>
-              </a:rPr>
-              <a:t>【</a:t>
-            </a:r>
-            <a:r>
-              <a:rPr lang="zh-CN" altLang="en-US" sz="2800" b="1" i="0" u="none" strike="noStrike" kern="0">
-                <a:solidFill>
-                  <a:schemeClr val="tx1"/>
-                </a:solidFill>
-                <a:latin typeface="Noto Sans SC" panose="020B0200000000000000" charset="-122"/>
-                <a:ea typeface="Noto Sans SC" panose="020B0200000000000000" charset="-122"/>
-                <a:cs typeface="Noto Sans SC" panose="020B0200000000000000" charset="-122"/>
-                <a:sym typeface="Noto Sans SC" panose="020B0200000000000000" charset="-122"/>
-              </a:rPr>
-              <a:t>老</a:t>
-            </a:r>
-            <a:r>
-              <a:rPr lang="en-US" altLang="zh-CN" sz="2800" b="1" i="0" u="none" strike="noStrike" kern="0">
-                <a:solidFill>
-                  <a:schemeClr val="tx1"/>
-                </a:solidFill>
-                <a:latin typeface="Noto Sans SC" panose="020B0200000000000000" charset="-122"/>
-                <a:ea typeface="Noto Sans SC" panose="020B0200000000000000" charset="-122"/>
-                <a:cs typeface="Noto Sans SC" panose="020B0200000000000000" charset="-122"/>
-                <a:sym typeface="Noto Sans SC" panose="020B0200000000000000" charset="-122"/>
-              </a:rPr>
-              <a:t>D</a:t>
-            </a:r>
-            <a:r>
-              <a:rPr lang="zh-CN" altLang="en-US" sz="2800" b="1" i="0" u="none" strike="noStrike" kern="0">
-                <a:solidFill>
-                  <a:schemeClr val="tx1"/>
-                </a:solidFill>
-                <a:latin typeface="Noto Sans SC" panose="020B0200000000000000" charset="-122"/>
-                <a:ea typeface="Noto Sans SC" panose="020B0200000000000000" charset="-122"/>
-                <a:cs typeface="Noto Sans SC" panose="020B0200000000000000" charset="-122"/>
-                <a:sym typeface="Noto Sans SC" panose="020B0200000000000000" charset="-122"/>
-              </a:rPr>
-              <a:t>的小铺</a:t>
-            </a:r>
-            <a:r>
-              <a:rPr lang="en-US" sz="2800" b="1" i="0" u="none" strike="noStrike" kern="0">
-                <a:solidFill>
-                  <a:schemeClr val="tx1"/>
-                </a:solidFill>
-                <a:latin typeface="Noto Sans SC" panose="020B0200000000000000" charset="-122"/>
-                <a:ea typeface="Noto Sans SC" panose="020B0200000000000000" charset="-122"/>
-                <a:cs typeface="Noto Sans SC" panose="020B0200000000000000" charset="-122"/>
-                <a:sym typeface="Noto Sans SC" panose="020B0200000000000000" charset="-122"/>
-              </a:rPr>
-              <a:t>】</a:t>
-            </a:r>
-            <a:endParaRPr lang="en-US" sz="2800" b="1" i="0" u="none" strike="noStrike" kern="0">
-              <a:solidFill>
-                <a:schemeClr val="tx1"/>
-              </a:solidFill>
-              <a:latin typeface="Noto Sans SC" panose="020B0200000000000000" charset="-122"/>
-              <a:ea typeface="Noto Sans SC" panose="020B0200000000000000" charset="-122"/>
-              <a:cs typeface="Noto Sans SC" panose="020B0200000000000000" charset="-122"/>
-              <a:sym typeface="Noto Sans SC" panose="020B0200000000000000" charset="-122"/>
-            </a:endParaRPr>
-          </a:p>
-        </p:txBody>
-      </p:sp>
-      <p:sp>
-        <p:nvSpPr>
-          <p:cNvPr id="10" name="AutoShape 4"/>
-          <p:cNvSpPr/>
-          <p:nvPr userDrawn="1"/>
-        </p:nvSpPr>
-        <p:spPr>
-          <a:xfrm>
-            <a:off x="3810" y="7202170"/>
-            <a:ext cx="9144000" cy="321310"/>
-          </a:xfrm>
-          <a:prstGeom prst="rect">
-            <a:avLst/>
-          </a:prstGeom>
-          <a:noFill/>
-          <a:ln w="12700" cap="flat" cmpd="sng">
-            <a:noFill/>
-            <a:prstDash val="solid"/>
-            <a:round/>
-          </a:ln>
-        </p:spPr>
-        <p:txBody>
-          <a:bodyPr vert="horz" wrap="square" lIns="0" tIns="0" rIns="0" bIns="0" rtlCol="0" anchor="ctr" anchorCtr="0"/>
-          <a:p>
-            <a:pPr indent="0" algn="ctr" defTabSz="914400">
-              <a:lnSpc>
-                <a:spcPct val="125000"/>
-              </a:lnSpc>
-              <a:spcBef>
-                <a:spcPts val="0"/>
-              </a:spcBef>
-              <a:spcAft>
-                <a:spcPts val="0"/>
-              </a:spcAft>
-              <a:defRPr/>
-            </a:pPr>
-            <a:r>
-              <a:rPr lang="zh-CN" altLang="en-US" sz="1800" b="0" i="0" u="none" strike="noStrike" kern="0">
-                <a:solidFill>
-                  <a:schemeClr val="tx1"/>
-                </a:solidFill>
-                <a:latin typeface="Noto Sans SC" panose="020B0200000000000000" charset="-122"/>
-                <a:ea typeface="Noto Sans SC" panose="020B0200000000000000" charset="-122"/>
-                <a:cs typeface="Noto Sans SC" panose="020B0200000000000000" charset="-122"/>
-                <a:sym typeface="Noto Sans SC" panose="020B0200000000000000" charset="-122"/>
-              </a:rPr>
-              <a:t>可代找电子资源</a:t>
-            </a:r>
-            <a:endParaRPr lang="zh-CN" altLang="en-US" sz="1800" b="0" i="0" u="none" strike="noStrike" kern="0">
-              <a:solidFill>
-                <a:schemeClr val="tx1"/>
-              </a:solidFill>
-              <a:latin typeface="Noto Sans SC" panose="020B0200000000000000" charset="-122"/>
-              <a:ea typeface="Noto Sans SC" panose="020B0200000000000000" charset="-122"/>
-              <a:cs typeface="Noto Sans SC" panose="020B0200000000000000" charset="-122"/>
-              <a:sym typeface="Noto Sans SC" panose="020B0200000000000000" charset="-122"/>
-            </a:endParaRPr>
-          </a:p>
-        </p:txBody>
-      </p:sp>
-      <p:sp>
-        <p:nvSpPr>
-          <p:cNvPr id="11" name="文本框 10"/>
-          <p:cNvSpPr txBox="1"/>
-          <p:nvPr userDrawn="1"/>
-        </p:nvSpPr>
-        <p:spPr>
-          <a:xfrm>
-            <a:off x="3175" y="3787775"/>
-            <a:ext cx="9144000" cy="706755"/>
-          </a:xfrm>
-          <a:prstGeom prst="rect">
-            <a:avLst/>
-          </a:prstGeom>
-          <a:noFill/>
-        </p:spPr>
-        <p:txBody>
-          <a:bodyPr wrap="square" rtlCol="0">
-            <a:spAutoFit/>
-          </a:bodyPr>
-          <a:p>
-            <a:pPr algn="ctr"/>
-            <a:r>
-              <a:rPr lang="en-US" altLang="zh-CN" sz="4000"/>
-              <a:t>e</a:t>
-            </a:r>
-            <a:r>
-              <a:rPr lang="en-US" altLang="zh-CN" sz="4000">
-                <a:sym typeface="+mn-ea"/>
-              </a:rPr>
-              <a:t>p</a:t>
-            </a:r>
-            <a:r>
-              <a:rPr lang="en-US" altLang="zh-CN" sz="4000"/>
-              <a:t>ub</a:t>
-            </a:r>
-            <a:r>
-              <a:rPr lang="zh-CN" altLang="en-US" sz="4000"/>
-              <a:t>、</a:t>
-            </a:r>
-            <a:r>
-              <a:rPr lang="en-US" altLang="zh-CN" sz="4000"/>
-              <a:t>pdf</a:t>
-            </a:r>
-            <a:r>
-              <a:rPr lang="zh-CN" altLang="en-US" sz="4000"/>
-              <a:t>、</a:t>
-            </a:r>
-            <a:r>
-              <a:rPr lang="en-US" altLang="zh-CN" sz="4000"/>
-              <a:t>azw3</a:t>
-            </a:r>
-            <a:r>
-              <a:rPr lang="zh-CN" altLang="en-US" sz="4000"/>
-              <a:t>、</a:t>
-            </a:r>
-            <a:r>
-              <a:rPr lang="en-US" altLang="zh-CN" sz="4000"/>
-              <a:t>mobi</a:t>
-            </a:r>
-            <a:r>
-              <a:rPr lang="zh-CN" altLang="en-US" sz="4000">
-                <a:ea typeface="宋体" panose="02010600030101010101" pitchFamily="2" charset="-122"/>
-              </a:rPr>
-              <a:t>、</a:t>
-            </a:r>
-            <a:r>
-              <a:rPr lang="en-US" altLang="zh-CN" sz="4000">
-                <a:ea typeface="宋体" panose="02010600030101010101" pitchFamily="2" charset="-122"/>
-              </a:rPr>
-              <a:t>docx</a:t>
-            </a:r>
-            <a:r>
-              <a:rPr lang="zh-CN" altLang="en-US" sz="4000">
-                <a:ea typeface="宋体" panose="02010600030101010101" pitchFamily="2" charset="-122"/>
-              </a:rPr>
-              <a:t>、</a:t>
-            </a:r>
-            <a:r>
-              <a:rPr lang="en-US" altLang="zh-CN" sz="4000">
-                <a:ea typeface="宋体" panose="02010600030101010101" pitchFamily="2" charset="-122"/>
-              </a:rPr>
-              <a:t>txt</a:t>
-            </a:r>
-            <a:r>
-              <a:rPr lang="en-US" altLang="zh-CN" sz="4000"/>
-              <a:t> </a:t>
-            </a:r>
-            <a:endParaRPr lang="en-US" altLang="zh-CN" sz="4000"/>
-          </a:p>
-        </p:txBody>
-      </p:sp>
-      <p:sp>
-        <p:nvSpPr>
-          <p:cNvPr id="16" name="副标题"/>
-          <p:cNvSpPr>
-            <a:spLocks noGrp="1"/>
-          </p:cNvSpPr>
-          <p:nvPr userDrawn="1">
-            <p:custDataLst>
-              <p:tags r:id="rId18"/>
-            </p:custDataLst>
-          </p:nvPr>
-        </p:nvSpPr>
-        <p:spPr>
-          <a:xfrm>
-            <a:off x="3175" y="4765040"/>
-            <a:ext cx="9144000" cy="386715"/>
-          </a:xfrm>
-          <a:prstGeom prst="rect">
-            <a:avLst/>
-          </a:prstGeom>
-        </p:spPr>
-        <p:txBody>
-          <a:bodyPr vert="horz" wrap="square" lIns="0" tIns="0" rIns="0" bIns="0" rtlCol="0" anchor="t" anchorCtr="0">
-            <a:noAutofit/>
-          </a:bodyPr>
-          <a:lstStyle>
-            <a:lvl1pPr marL="0" indent="0" algn="ctr" defTabSz="914400" rtl="0" eaLnBrk="1" latinLnBrk="0" hangingPunct="1">
-              <a:lnSpc>
-                <a:spcPct val="100000"/>
-              </a:lnSpc>
-              <a:spcBef>
-                <a:spcPts val="1000"/>
-              </a:spcBef>
-              <a:buFont typeface="Arial" panose="020B0604020202020204" pitchFamily="34" charset="0"/>
-              <a:buNone/>
-              <a:defRPr sz="2400" kern="1200">
-                <a:solidFill>
-                  <a:schemeClr val="accent1">
-                    <a:lumMod val="50000"/>
-                  </a:schemeClr>
-                </a:solidFill>
-                <a:latin typeface="汉仪古隶简" panose="00020600040101010101" charset="-122"/>
-                <a:ea typeface="汉仪古隶简" panose="00020600040101010101" charset="-122"/>
-                <a:cs typeface="+mn-cs"/>
-                <a:sym typeface="汉仪古隶简" panose="00020600040101010101" charset="-122"/>
-              </a:defRPr>
-            </a:lvl1pPr>
-            <a:lvl2pPr marL="457200" indent="0" algn="ctr" defTabSz="914400" rtl="0" eaLnBrk="1" latinLnBrk="0" hangingPunct="1">
-              <a:lnSpc>
-                <a:spcPct val="130000"/>
-              </a:lnSpc>
-              <a:spcBef>
-                <a:spcPts val="0"/>
-              </a:spcBef>
-              <a:buFont typeface="Arial" panose="020B0604020202020204" pitchFamily="34" charset="0"/>
-              <a:buNone/>
-              <a:defRPr sz="2000" kern="1200">
-                <a:solidFill>
-                  <a:schemeClr val="tx1">
-                    <a:lumMod val="65000"/>
-                    <a:lumOff val="35000"/>
-                  </a:schemeClr>
-                </a:solidFill>
-                <a:latin typeface="汉仪古隶简" panose="00020600040101010101" charset="-122"/>
-                <a:ea typeface="汉仪古隶简" panose="00020600040101010101" charset="-122"/>
-                <a:cs typeface="+mn-cs"/>
-                <a:sym typeface="汉仪古隶简" panose="00020600040101010101" charset="-122"/>
-              </a:defRPr>
-            </a:lvl2pPr>
-            <a:lvl3pPr marL="914400" indent="0" algn="ctr" defTabSz="914400" rtl="0" eaLnBrk="1" latinLnBrk="0" hangingPunct="1">
-              <a:lnSpc>
-                <a:spcPct val="130000"/>
-              </a:lnSpc>
-              <a:spcBef>
-                <a:spcPts val="0"/>
-              </a:spcBef>
-              <a:buFont typeface="Arial" panose="020B0604020202020204" pitchFamily="34" charset="0"/>
-              <a:buNone/>
-              <a:defRPr sz="1800" kern="1200">
-                <a:solidFill>
-                  <a:schemeClr val="tx1">
-                    <a:lumMod val="65000"/>
-                    <a:lumOff val="35000"/>
-                  </a:schemeClr>
-                </a:solidFill>
-                <a:latin typeface="汉仪古隶简" panose="00020600040101010101" charset="-122"/>
-                <a:ea typeface="汉仪古隶简" panose="00020600040101010101" charset="-122"/>
-                <a:cs typeface="+mn-cs"/>
-                <a:sym typeface="汉仪古隶简" panose="00020600040101010101" charset="-122"/>
-              </a:defRPr>
-            </a:lvl3pPr>
-            <a:lvl4pPr marL="1371600" indent="0" algn="ctr" defTabSz="914400" rtl="0" eaLnBrk="1" latinLnBrk="0" hangingPunct="1">
-              <a:lnSpc>
-                <a:spcPct val="130000"/>
-              </a:lnSpc>
-              <a:spcBef>
-                <a:spcPts val="0"/>
-              </a:spcBef>
-              <a:buFont typeface="Arial" panose="020B0604020202020204" pitchFamily="34" charset="0"/>
-              <a:buNone/>
-              <a:defRPr sz="1600" kern="1200">
-                <a:solidFill>
-                  <a:schemeClr val="tx1">
-                    <a:lumMod val="65000"/>
-                    <a:lumOff val="35000"/>
-                  </a:schemeClr>
-                </a:solidFill>
-                <a:latin typeface="汉仪古隶简" panose="00020600040101010101" charset="-122"/>
-                <a:ea typeface="汉仪古隶简" panose="00020600040101010101" charset="-122"/>
-                <a:cs typeface="+mn-cs"/>
-                <a:sym typeface="汉仪古隶简" panose="00020600040101010101" charset="-122"/>
-              </a:defRPr>
-            </a:lvl4pPr>
-            <a:lvl5pPr marL="1828800" indent="0" algn="ctr" defTabSz="914400" rtl="0" eaLnBrk="1" latinLnBrk="0" hangingPunct="1">
-              <a:lnSpc>
-                <a:spcPct val="130000"/>
-              </a:lnSpc>
-              <a:spcBef>
-                <a:spcPts val="0"/>
-              </a:spcBef>
-              <a:buFont typeface="Arial" panose="020B0604020202020204" pitchFamily="34" charset="0"/>
-              <a:buNone/>
-              <a:defRPr sz="1600" kern="1200">
-                <a:solidFill>
-                  <a:schemeClr val="tx1">
-                    <a:lumMod val="65000"/>
-                    <a:lumOff val="35000"/>
-                  </a:schemeClr>
-                </a:solidFill>
-                <a:latin typeface="汉仪古隶简" panose="00020600040101010101" charset="-122"/>
-                <a:ea typeface="汉仪古隶简" panose="00020600040101010101" charset="-122"/>
-                <a:cs typeface="+mn-cs"/>
-                <a:sym typeface="汉仪古隶简" panose="00020600040101010101" charset="-122"/>
-              </a:defRPr>
-            </a:lvl5pPr>
-            <a:lvl6pPr marL="2286000" indent="0" algn="ctr" defTabSz="914400" rtl="0" eaLnBrk="1" latinLnBrk="0" hangingPunct="1">
-              <a:lnSpc>
-                <a:spcPct val="90000"/>
-              </a:lnSpc>
-              <a:spcBef>
-                <a:spcPts val="500"/>
-              </a:spcBef>
-              <a:buFont typeface="Arial" panose="020B0604020202020204" pitchFamily="34" charset="0"/>
-              <a:buNone/>
-              <a:defRPr sz="1600" kern="1200">
-                <a:solidFill>
-                  <a:schemeClr val="tx1"/>
-                </a:solidFill>
-                <a:latin typeface="+mn-lt"/>
-                <a:ea typeface="+mn-ea"/>
-                <a:cs typeface="+mn-cs"/>
-              </a:defRPr>
-            </a:lvl6pPr>
-            <a:lvl7pPr marL="2743200" indent="0" algn="ctr" defTabSz="914400" rtl="0" eaLnBrk="1" latinLnBrk="0" hangingPunct="1">
-              <a:lnSpc>
-                <a:spcPct val="90000"/>
-              </a:lnSpc>
-              <a:spcBef>
-                <a:spcPts val="500"/>
-              </a:spcBef>
-              <a:buFont typeface="Arial" panose="020B0604020202020204" pitchFamily="34" charset="0"/>
-              <a:buNone/>
-              <a:defRPr sz="1600" kern="1200">
-                <a:solidFill>
-                  <a:schemeClr val="tx1"/>
-                </a:solidFill>
-                <a:latin typeface="+mn-lt"/>
-                <a:ea typeface="+mn-ea"/>
-                <a:cs typeface="+mn-cs"/>
-              </a:defRPr>
-            </a:lvl7pPr>
-            <a:lvl8pPr marL="3200400" indent="0" algn="ctr" defTabSz="914400" rtl="0" eaLnBrk="1" latinLnBrk="0" hangingPunct="1">
-              <a:lnSpc>
-                <a:spcPct val="90000"/>
-              </a:lnSpc>
-              <a:spcBef>
-                <a:spcPts val="500"/>
-              </a:spcBef>
-              <a:buFont typeface="Arial" panose="020B0604020202020204" pitchFamily="34" charset="0"/>
-              <a:buNone/>
-              <a:defRPr sz="1600" kern="1200">
-                <a:solidFill>
-                  <a:schemeClr val="tx1"/>
-                </a:solidFill>
-                <a:latin typeface="+mn-lt"/>
-                <a:ea typeface="+mn-ea"/>
-                <a:cs typeface="+mn-cs"/>
-              </a:defRPr>
-            </a:lvl8pPr>
-            <a:lvl9pPr marL="3657600" indent="0" algn="ctr" defTabSz="914400" rtl="0" eaLnBrk="1" latinLnBrk="0" hangingPunct="1">
-              <a:lnSpc>
-                <a:spcPct val="90000"/>
-              </a:lnSpc>
-              <a:spcBef>
-                <a:spcPts val="500"/>
-              </a:spcBef>
-              <a:buFont typeface="Arial" panose="020B0604020202020204" pitchFamily="34" charset="0"/>
-              <a:buNone/>
-              <a:defRPr sz="1600" kern="1200">
-                <a:solidFill>
-                  <a:schemeClr val="tx1"/>
-                </a:solidFill>
-                <a:latin typeface="+mn-lt"/>
-                <a:ea typeface="+mn-ea"/>
-                <a:cs typeface="+mn-cs"/>
-              </a:defRPr>
-            </a:lvl9pPr>
-          </a:lstStyle>
-          <a:p>
-            <a:pPr algn="ctr"/>
-            <a:r>
-              <a:rPr lang="zh-CN" sz="3600" b="1">
-                <a:latin typeface="黑体" panose="02010609060101010101" charset="-122"/>
-                <a:ea typeface="黑体" panose="02010609060101010101" charset="-122"/>
-                <a:cs typeface="黑体" panose="02010609060101010101" charset="-122"/>
-              </a:rPr>
-              <a:t>高清电子书</a:t>
-            </a:r>
-            <a:r>
-              <a:rPr lang="en-US" altLang="zh-CN" sz="3600" b="1">
-                <a:latin typeface="黑体" panose="02010609060101010101" charset="-122"/>
-                <a:ea typeface="黑体" panose="02010609060101010101" charset="-122"/>
-                <a:cs typeface="黑体" panose="02010609060101010101" charset="-122"/>
-              </a:rPr>
-              <a:t>-</a:t>
-            </a:r>
-            <a:r>
-              <a:rPr lang="zh-CN" altLang="en-US" sz="3600" b="1">
-                <a:latin typeface="黑体" panose="02010609060101010101" charset="-122"/>
-                <a:ea typeface="黑体" panose="02010609060101010101" charset="-122"/>
-                <a:cs typeface="黑体" panose="02010609060101010101" charset="-122"/>
-              </a:rPr>
-              <a:t>精排</a:t>
-            </a:r>
-            <a:r>
-              <a:rPr lang="zh-CN" sz="3600" b="1">
-                <a:latin typeface="黑体" panose="02010609060101010101" charset="-122"/>
-                <a:ea typeface="黑体" panose="02010609060101010101" charset="-122"/>
-                <a:cs typeface="黑体" panose="02010609060101010101" charset="-122"/>
-              </a:rPr>
-              <a:t>非扫描版</a:t>
-            </a:r>
-            <a:endParaRPr lang="zh-CN" sz="3600" b="1">
-              <a:latin typeface="黑体" panose="02010609060101010101" charset="-122"/>
-              <a:ea typeface="黑体" panose="02010609060101010101" charset="-122"/>
-              <a:cs typeface="黑体" panose="02010609060101010101" charset="-122"/>
             </a:endParaRPr>
           </a:p>
         </p:txBody>
@@ -3799,114 +2771,6 @@
 <file path=ppt/tags/tag10.xml><?xml version="1.0" encoding="utf-8"?>
 <p:tagLst xmlns:p="http://schemas.openxmlformats.org/presentationml/2006/main">
   <p:tag name="KSO_WM_UNIT_TYPE" val="i"/>
-  <p:tag name="KSO_WM_UNIT_INDEX" val="6"/>
-  <p:tag name="KSO_WM_BEAUTIFY_FLAG" val="#wm#"/>
-  <p:tag name="KSO_WM_TAG_VERSION" val="3.0"/>
-  <p:tag name="KSO_WM_UNIT_ID" val="_1*i*6"/>
-  <p:tag name="KSO_WM_UNIT_ISNUMDGMTITLE" val="0"/>
-  <p:tag name="KSO_WM_UNIT_NOCLEAR" val="0"/>
-  <p:tag name="KSO_WM_UNIT_HIGHLIGHT" val="0"/>
-  <p:tag name="KSO_WM_UNIT_COMPATIBLE" val="0"/>
-  <p:tag name="KSO_WM_UNIT_DIAGRAM_ISNUMVISUAL" val="0"/>
-  <p:tag name="KSO_WM_UNIT_DIAGRAM_ISREFERUNIT" val="0"/>
-  <p:tag name="KSO_WM_UNIT_LAYERLEVEL" val="1"/>
-</p:tagLst>
-</file>
-
-<file path=ppt/tags/tag11.xml><?xml version="1.0" encoding="utf-8"?>
-<p:tagLst xmlns:p="http://schemas.openxmlformats.org/presentationml/2006/main">
-  <p:tag name="KSO_WM_UNIT_TYPE" val="i"/>
-  <p:tag name="KSO_WM_UNIT_INDEX" val="1"/>
-  <p:tag name="KSO_WM_BEAUTIFY_FLAG" val="#wm#"/>
-  <p:tag name="KSO_WM_TAG_VERSION" val="3.0"/>
-  <p:tag name="KSO_WM_UNIT_ID" val="_1*i*1"/>
-  <p:tag name="KSO_WM_UNIT_ISNUMDGMTITLE" val="0"/>
-  <p:tag name="KSO_WM_UNIT_NOCLEAR" val="0"/>
-  <p:tag name="KSO_WM_UNIT_HIGHLIGHT" val="0"/>
-  <p:tag name="KSO_WM_UNIT_COMPATIBLE" val="0"/>
-  <p:tag name="KSO_WM_UNIT_DIAGRAM_ISNUMVISUAL" val="0"/>
-  <p:tag name="KSO_WM_UNIT_DIAGRAM_ISREFERUNIT" val="0"/>
-  <p:tag name="KSO_WM_UNIT_LAYERLEVEL" val="1"/>
-</p:tagLst>
-</file>
-
-<file path=ppt/tags/tag12.xml><?xml version="1.0" encoding="utf-8"?>
-<p:tagLst xmlns:p="http://schemas.openxmlformats.org/presentationml/2006/main">
-  <p:tag name="KSO_WM_UNIT_TYPE" val="i"/>
-  <p:tag name="KSO_WM_UNIT_INDEX" val="4"/>
-  <p:tag name="KSO_WM_BEAUTIFY_FLAG" val="#wm#"/>
-  <p:tag name="KSO_WM_TAG_VERSION" val="3.0"/>
-  <p:tag name="KSO_WM_UNIT_ID" val="_1*i*4"/>
-  <p:tag name="KSO_WM_UNIT_ISNUMDGMTITLE" val="0"/>
-  <p:tag name="KSO_WM_UNIT_NOCLEAR" val="0"/>
-  <p:tag name="KSO_WM_UNIT_HIGHLIGHT" val="0"/>
-  <p:tag name="KSO_WM_UNIT_COMPATIBLE" val="0"/>
-  <p:tag name="KSO_WM_UNIT_DIAGRAM_ISNUMVISUAL" val="0"/>
-  <p:tag name="KSO_WM_UNIT_DIAGRAM_ISREFERUNIT" val="0"/>
-  <p:tag name="KSO_WM_UNIT_LAYERLEVEL" val="1"/>
-</p:tagLst>
-</file>
-
-<file path=ppt/tags/tag13.xml><?xml version="1.0" encoding="utf-8"?>
-<p:tagLst xmlns:p="http://schemas.openxmlformats.org/presentationml/2006/main">
-  <p:tag name="KSO_WM_UNIT_TYPE" val="i"/>
-  <p:tag name="KSO_WM_UNIT_INDEX" val="8"/>
-  <p:tag name="KSO_WM_BEAUTIFY_FLAG" val="#wm#"/>
-  <p:tag name="KSO_WM_TAG_VERSION" val="3.0"/>
-  <p:tag name="KSO_WM_UNIT_ID" val="_1*i*8"/>
-  <p:tag name="KSO_WM_UNIT_ISNUMDGMTITLE" val="0"/>
-  <p:tag name="KSO_WM_UNIT_NOCLEAR" val="0"/>
-  <p:tag name="KSO_WM_UNIT_HIGHLIGHT" val="0"/>
-  <p:tag name="KSO_WM_UNIT_COMPATIBLE" val="0"/>
-  <p:tag name="KSO_WM_UNIT_DIAGRAM_ISNUMVISUAL" val="0"/>
-  <p:tag name="KSO_WM_UNIT_DIAGRAM_ISREFERUNIT" val="0"/>
-  <p:tag name="KSO_WM_UNIT_LAYERLEVEL" val="1"/>
-</p:tagLst>
-</file>
-
-<file path=ppt/tags/tag14.xml><?xml version="1.0" encoding="utf-8"?>
-<p:tagLst xmlns:p="http://schemas.openxmlformats.org/presentationml/2006/main">
-  <p:tag name="KSO_WM_UNIT_TYPE" val="b"/>
-  <p:tag name="KSO_WM_UNIT_INDEX" val="1"/>
-  <p:tag name="KSO_WM_BEAUTIFY_FLAG" val="#wm#"/>
-  <p:tag name="KSO_WM_TAG_VERSION" val="3.0"/>
-  <p:tag name="KSO_WM_UNIT_ID" val="custom40498660_1*b*1"/>
-  <p:tag name="KSO_WM_UNIT_ISNUMDGMTITLE" val="0"/>
-  <p:tag name="KSO_WM_UNIT_HIGHLIGHT" val="0"/>
-  <p:tag name="KSO_WM_UNIT_COMPATIBLE" val="0"/>
-  <p:tag name="KSO_WM_UNIT_DIAGRAM_ISNUMVISUAL" val="0"/>
-  <p:tag name="KSO_WM_UNIT_DIAGRAM_ISREFERUNIT" val="0"/>
-  <p:tag name="KSO_WM_UNIT_LAYERLEVEL" val="1"/>
-  <p:tag name="KSO_WM_TEMPLATE_INDEX" val="40498660"/>
-  <p:tag name="KSO_WM_TEMPLATE_CATEGORY" val="custom"/>
-  <p:tag name="KSO_WM_UNIT_ISCONTENTSTITLE" val="0"/>
-  <p:tag name="KSO_WM_UNIT_VALUE" val="33"/>
-  <p:tag name="KSO_WM_UNIT_TEXT_TYPE" val="1"/>
-  <p:tag name="KSO_WM_UNIT_NOCLEAR" val="0"/>
-  <p:tag name="KSO_WM_UNIT_PRESET_TEXT" val="单击此处添加副标题"/>
-</p:tagLst>
-</file>
-
-<file path=ppt/tags/tag15.xml><?xml version="1.0" encoding="utf-8"?>
-<p:tagLst xmlns:p="http://schemas.openxmlformats.org/presentationml/2006/main">
-  <p:tag name="KSO_WM_UNIT_TYPE" val="i"/>
-  <p:tag name="KSO_WM_UNIT_INDEX" val="1"/>
-  <p:tag name="KSO_WM_BEAUTIFY_FLAG" val="#wm#"/>
-  <p:tag name="KSO_WM_TAG_VERSION" val="3.0"/>
-  <p:tag name="KSO_WM_UNIT_ID" val="_0*i*1"/>
-  <p:tag name="KSO_WM_UNIT_ISNUMDGMTITLE" val="0"/>
-  <p:tag name="KSO_WM_UNIT_NOCLEAR" val="0"/>
-  <p:tag name="KSO_WM_UNIT_HIGHLIGHT" val="0"/>
-  <p:tag name="KSO_WM_UNIT_COMPATIBLE" val="0"/>
-  <p:tag name="KSO_WM_UNIT_DIAGRAM_ISNUMVISUAL" val="0"/>
-  <p:tag name="KSO_WM_UNIT_DIAGRAM_ISREFERUNIT" val="0"/>
-  <p:tag name="KSO_WM_UNIT_LAYERLEVEL" val="1"/>
-</p:tagLst>
-</file>
-
-<file path=ppt/tags/tag16.xml><?xml version="1.0" encoding="utf-8"?>
-<p:tagLst xmlns:p="http://schemas.openxmlformats.org/presentationml/2006/main">
-  <p:tag name="KSO_WM_UNIT_TYPE" val="i"/>
   <p:tag name="KSO_WM_UNIT_INDEX" val="2"/>
   <p:tag name="KSO_WM_BEAUTIFY_FLAG" val="#wm#"/>
   <p:tag name="KSO_WM_TAG_VERSION" val="3.0"/>
@@ -3921,7 +2785,7 @@
 </p:tagLst>
 </file>
 
-<file path=ppt/tags/tag17.xml><?xml version="1.0" encoding="utf-8"?>
+<file path=ppt/tags/tag11.xml><?xml version="1.0" encoding="utf-8"?>
 <p:tagLst xmlns:p="http://schemas.openxmlformats.org/presentationml/2006/main">
   <p:tag name="KSO_WM_UNIT_TYPE" val="i"/>
   <p:tag name="KSO_WM_UNIT_INDEX" val="3"/>
@@ -3938,7 +2802,7 @@
 </p:tagLst>
 </file>
 
-<file path=ppt/tags/tag18.xml><?xml version="1.0" encoding="utf-8"?>
+<file path=ppt/tags/tag12.xml><?xml version="1.0" encoding="utf-8"?>
 <p:tagLst xmlns:p="http://schemas.openxmlformats.org/presentationml/2006/main">
   <p:tag name="KSO_WM_UNIT_TYPE" val="a"/>
   <p:tag name="KSO_WM_UNIT_INDEX" val="1"/>
@@ -3959,7 +2823,7 @@
 </p:tagLst>
 </file>
 
-<file path=ppt/tags/tag19.xml><?xml version="1.0" encoding="utf-8"?>
+<file path=ppt/tags/tag13.xml><?xml version="1.0" encoding="utf-8"?>
 <p:tagLst xmlns:p="http://schemas.openxmlformats.org/presentationml/2006/main">
   <p:tag name="KSO_WM_UNIT_TYPE" val="f"/>
   <p:tag name="KSO_WM_UNIT_SUBTYPE" val="a"/>
@@ -3981,24 +2845,7 @@
 </p:tagLst>
 </file>
 
-<file path=ppt/tags/tag2.xml><?xml version="1.0" encoding="utf-8"?>
-<p:tagLst xmlns:p="http://schemas.openxmlformats.org/presentationml/2006/main">
-  <p:tag name="KSO_WM_UNIT_TYPE" val="i"/>
-  <p:tag name="KSO_WM_UNIT_INDEX" val="3"/>
-  <p:tag name="KSO_WM_BEAUTIFY_FLAG" val="#wm#"/>
-  <p:tag name="KSO_WM_TAG_VERSION" val="3.0"/>
-  <p:tag name="KSO_WM_UNIT_ID" val="_1*i*3"/>
-  <p:tag name="KSO_WM_UNIT_ISNUMDGMTITLE" val="0"/>
-  <p:tag name="KSO_WM_UNIT_NOCLEAR" val="0"/>
-  <p:tag name="KSO_WM_UNIT_HIGHLIGHT" val="0"/>
-  <p:tag name="KSO_WM_UNIT_COMPATIBLE" val="0"/>
-  <p:tag name="KSO_WM_UNIT_DIAGRAM_ISNUMVISUAL" val="0"/>
-  <p:tag name="KSO_WM_UNIT_DIAGRAM_ISREFERUNIT" val="0"/>
-  <p:tag name="KSO_WM_UNIT_LAYERLEVEL" val="1"/>
-</p:tagLst>
-</file>
-
-<file path=ppt/tags/tag20.xml><?xml version="1.0" encoding="utf-8"?>
+<file path=ppt/tags/tag14.xml><?xml version="1.0" encoding="utf-8"?>
 <p:tagLst xmlns:p="http://schemas.openxmlformats.org/presentationml/2006/main">
   <p:tag name="KSO_WM_UNIT_ID" val="_0**"/>
   <p:tag name="KSO_WM_BEAUTIFY_FLAG" val="#wm#"/>
@@ -4013,7 +2860,7 @@
 </p:tagLst>
 </file>
 
-<file path=ppt/tags/tag21.xml><?xml version="1.0" encoding="utf-8"?>
+<file path=ppt/tags/tag15.xml><?xml version="1.0" encoding="utf-8"?>
 <p:tagLst xmlns:p="http://schemas.openxmlformats.org/presentationml/2006/main">
   <p:tag name="KSO_WM_UNIT_ID" val="_0**"/>
   <p:tag name="KSO_WM_BEAUTIFY_FLAG" val="#wm#"/>
@@ -4028,7 +2875,7 @@
 </p:tagLst>
 </file>
 
-<file path=ppt/tags/tag22.xml><?xml version="1.0" encoding="utf-8"?>
+<file path=ppt/tags/tag16.xml><?xml version="1.0" encoding="utf-8"?>
 <p:tagLst xmlns:p="http://schemas.openxmlformats.org/presentationml/2006/main">
   <p:tag name="KSO_WM_UNIT_ID" val="_0**"/>
   <p:tag name="KSO_WM_BEAUTIFY_FLAG" val="#wm#"/>
@@ -4043,7 +2890,7 @@
 </p:tagLst>
 </file>
 
-<file path=ppt/tags/tag23.xml><?xml version="1.0" encoding="utf-8"?>
+<file path=ppt/tags/tag17.xml><?xml version="1.0" encoding="utf-8"?>
 <p:tagLst xmlns:p="http://schemas.openxmlformats.org/presentationml/2006/main">
   <p:tag name="KSO_WM_TEMPLATE_SUBCATEGORY" val="29"/>
   <p:tag name="KSO_WM_TEMPLATE_COLOR_TYPE" val="0"/>
@@ -4056,7 +2903,7 @@
 </p:tagLst>
 </file>
 
-<file path=ppt/tags/tag24.xml><?xml version="1.0" encoding="utf-8"?>
+<file path=ppt/tags/tag18.xml><?xml version="1.0" encoding="utf-8"?>
 <p:tagLst xmlns:p="http://schemas.openxmlformats.org/presentationml/2006/main">
   <p:tag name="KSO_WM_UNIT_TYPE" val="b"/>
   <p:tag name="KSO_WM_UNIT_INDEX" val="1"/>
@@ -4073,6 +2920,23 @@
   <p:tag name="KSO_WM_UNIT_LAYERLEVEL" val="1"/>
   <p:tag name="KSO_WM_UNIT_ISCONTENTSTITLE" val="0"/>
   <p:tag name="KSO_WM_UNIT_VALUE" val="33"/>
+</p:tagLst>
+</file>
+
+<file path=ppt/tags/tag2.xml><?xml version="1.0" encoding="utf-8"?>
+<p:tagLst xmlns:p="http://schemas.openxmlformats.org/presentationml/2006/main">
+  <p:tag name="KSO_WM_UNIT_TYPE" val="i"/>
+  <p:tag name="KSO_WM_UNIT_INDEX" val="3"/>
+  <p:tag name="KSO_WM_BEAUTIFY_FLAG" val="#wm#"/>
+  <p:tag name="KSO_WM_TAG_VERSION" val="3.0"/>
+  <p:tag name="KSO_WM_UNIT_ID" val="_1*i*3"/>
+  <p:tag name="KSO_WM_UNIT_ISNUMDGMTITLE" val="0"/>
+  <p:tag name="KSO_WM_UNIT_NOCLEAR" val="0"/>
+  <p:tag name="KSO_WM_UNIT_HIGHLIGHT" val="0"/>
+  <p:tag name="KSO_WM_UNIT_COMPATIBLE" val="0"/>
+  <p:tag name="KSO_WM_UNIT_DIAGRAM_ISNUMVISUAL" val="0"/>
+  <p:tag name="KSO_WM_UNIT_DIAGRAM_ISREFERUNIT" val="0"/>
+  <p:tag name="KSO_WM_UNIT_LAYERLEVEL" val="1"/>
 </p:tagLst>
 </file>
 
@@ -4095,51 +2959,6 @@
 
 <file path=ppt/tags/tag4.xml><?xml version="1.0" encoding="utf-8"?>
 <p:tagLst xmlns:p="http://schemas.openxmlformats.org/presentationml/2006/main">
-  <p:tag name="KSO_WM_UNIT_ID" val="_1**"/>
-  <p:tag name="KSO_WM_BEAUTIFY_FLAG" val="#wm#"/>
-  <p:tag name="KSO_WM_TAG_VERSION" val="3.0"/>
-  <p:tag name="KSO_WM_UNIT_ISNUMDGMTITLE" val="0"/>
-  <p:tag name="KSO_WM_UNIT_NOCLEAR" val="0"/>
-  <p:tag name="KSO_WM_UNIT_HIGHLIGHT" val="0"/>
-  <p:tag name="KSO_WM_UNIT_COMPATIBLE" val="0"/>
-  <p:tag name="KSO_WM_UNIT_DIAGRAM_ISNUMVISUAL" val="0"/>
-  <p:tag name="KSO_WM_UNIT_DIAGRAM_ISREFERUNIT" val="0"/>
-  <p:tag name="KSO_WM_UNIT_LAYERLEVEL" val="1"/>
-</p:tagLst>
-</file>
-
-<file path=ppt/tags/tag5.xml><?xml version="1.0" encoding="utf-8"?>
-<p:tagLst xmlns:p="http://schemas.openxmlformats.org/presentationml/2006/main">
-  <p:tag name="KSO_WM_UNIT_ID" val="_1**"/>
-  <p:tag name="KSO_WM_BEAUTIFY_FLAG" val="#wm#"/>
-  <p:tag name="KSO_WM_TAG_VERSION" val="3.0"/>
-  <p:tag name="KSO_WM_UNIT_ISNUMDGMTITLE" val="0"/>
-  <p:tag name="KSO_WM_UNIT_NOCLEAR" val="0"/>
-  <p:tag name="KSO_WM_UNIT_HIGHLIGHT" val="0"/>
-  <p:tag name="KSO_WM_UNIT_COMPATIBLE" val="0"/>
-  <p:tag name="KSO_WM_UNIT_DIAGRAM_ISNUMVISUAL" val="0"/>
-  <p:tag name="KSO_WM_UNIT_DIAGRAM_ISREFERUNIT" val="0"/>
-  <p:tag name="KSO_WM_UNIT_LAYERLEVEL" val="1"/>
-</p:tagLst>
-</file>
-
-<file path=ppt/tags/tag6.xml><?xml version="1.0" encoding="utf-8"?>
-<p:tagLst xmlns:p="http://schemas.openxmlformats.org/presentationml/2006/main">
-  <p:tag name="KSO_WM_UNIT_ID" val="_1**"/>
-  <p:tag name="KSO_WM_BEAUTIFY_FLAG" val="#wm#"/>
-  <p:tag name="KSO_WM_TAG_VERSION" val="3.0"/>
-  <p:tag name="KSO_WM_UNIT_ISNUMDGMTITLE" val="0"/>
-  <p:tag name="KSO_WM_UNIT_NOCLEAR" val="0"/>
-  <p:tag name="KSO_WM_UNIT_HIGHLIGHT" val="0"/>
-  <p:tag name="KSO_WM_UNIT_COMPATIBLE" val="0"/>
-  <p:tag name="KSO_WM_UNIT_DIAGRAM_ISNUMVISUAL" val="0"/>
-  <p:tag name="KSO_WM_UNIT_DIAGRAM_ISREFERUNIT" val="0"/>
-  <p:tag name="KSO_WM_UNIT_LAYERLEVEL" val="1"/>
-</p:tagLst>
-</file>
-
-<file path=ppt/tags/tag7.xml><?xml version="1.0" encoding="utf-8"?>
-<p:tagLst xmlns:p="http://schemas.openxmlformats.org/presentationml/2006/main">
   <p:tag name="KSO_WM_UNIT_TYPE" val="a"/>
   <p:tag name="KSO_WM_UNIT_INDEX" val="1"/>
   <p:tag name="KSO_WM_BEAUTIFY_FLAG" val="#wm#"/>
@@ -4158,7 +2977,7 @@
 </p:tagLst>
 </file>
 
-<file path=ppt/tags/tag8.xml><?xml version="1.0" encoding="utf-8"?>
+<file path=ppt/tags/tag5.xml><?xml version="1.0" encoding="utf-8"?>
 <p:tagLst xmlns:p="http://schemas.openxmlformats.org/presentationml/2006/main">
   <p:tag name="KSO_WM_UNIT_TYPE" val="b"/>
   <p:tag name="KSO_WM_UNIT_INDEX" val="1"/>
@@ -4178,13 +2997,64 @@
 </p:tagLst>
 </file>
 
-<file path=ppt/tags/tag9.xml><?xml version="1.0" encoding="utf-8"?>
+<file path=ppt/tags/tag6.xml><?xml version="1.0" encoding="utf-8"?>
 <p:tagLst xmlns:p="http://schemas.openxmlformats.org/presentationml/2006/main">
   <p:tag name="KSO_WM_UNIT_TYPE" val="i"/>
   <p:tag name="KSO_WM_UNIT_INDEX" val="7"/>
   <p:tag name="KSO_WM_BEAUTIFY_FLAG" val="#wm#"/>
   <p:tag name="KSO_WM_TAG_VERSION" val="3.0"/>
   <p:tag name="KSO_WM_UNIT_ID" val="_1*i*7"/>
+  <p:tag name="KSO_WM_UNIT_ISNUMDGMTITLE" val="0"/>
+  <p:tag name="KSO_WM_UNIT_NOCLEAR" val="0"/>
+  <p:tag name="KSO_WM_UNIT_HIGHLIGHT" val="0"/>
+  <p:tag name="KSO_WM_UNIT_COMPATIBLE" val="0"/>
+  <p:tag name="KSO_WM_UNIT_DIAGRAM_ISNUMVISUAL" val="0"/>
+  <p:tag name="KSO_WM_UNIT_DIAGRAM_ISREFERUNIT" val="0"/>
+  <p:tag name="KSO_WM_UNIT_LAYERLEVEL" val="1"/>
+</p:tagLst>
+</file>
+
+<file path=ppt/tags/tag7.xml><?xml version="1.0" encoding="utf-8"?>
+<p:tagLst xmlns:p="http://schemas.openxmlformats.org/presentationml/2006/main">
+  <p:tag name="KSO_WM_UNIT_TYPE" val="i"/>
+  <p:tag name="KSO_WM_UNIT_INDEX" val="6"/>
+  <p:tag name="KSO_WM_BEAUTIFY_FLAG" val="#wm#"/>
+  <p:tag name="KSO_WM_TAG_VERSION" val="3.0"/>
+  <p:tag name="KSO_WM_UNIT_ID" val="_1*i*6"/>
+  <p:tag name="KSO_WM_UNIT_ISNUMDGMTITLE" val="0"/>
+  <p:tag name="KSO_WM_UNIT_NOCLEAR" val="0"/>
+  <p:tag name="KSO_WM_UNIT_HIGHLIGHT" val="0"/>
+  <p:tag name="KSO_WM_UNIT_COMPATIBLE" val="0"/>
+  <p:tag name="KSO_WM_UNIT_DIAGRAM_ISNUMVISUAL" val="0"/>
+  <p:tag name="KSO_WM_UNIT_DIAGRAM_ISREFERUNIT" val="0"/>
+  <p:tag name="KSO_WM_UNIT_LAYERLEVEL" val="1"/>
+</p:tagLst>
+</file>
+
+<file path=ppt/tags/tag8.xml><?xml version="1.0" encoding="utf-8"?>
+<p:tagLst xmlns:p="http://schemas.openxmlformats.org/presentationml/2006/main">
+  <p:tag name="KSO_WM_UNIT_TYPE" val="i"/>
+  <p:tag name="KSO_WM_UNIT_INDEX" val="4"/>
+  <p:tag name="KSO_WM_BEAUTIFY_FLAG" val="#wm#"/>
+  <p:tag name="KSO_WM_TAG_VERSION" val="3.0"/>
+  <p:tag name="KSO_WM_UNIT_ID" val="_1*i*4"/>
+  <p:tag name="KSO_WM_UNIT_ISNUMDGMTITLE" val="0"/>
+  <p:tag name="KSO_WM_UNIT_NOCLEAR" val="0"/>
+  <p:tag name="KSO_WM_UNIT_HIGHLIGHT" val="0"/>
+  <p:tag name="KSO_WM_UNIT_COMPATIBLE" val="0"/>
+  <p:tag name="KSO_WM_UNIT_DIAGRAM_ISNUMVISUAL" val="0"/>
+  <p:tag name="KSO_WM_UNIT_DIAGRAM_ISREFERUNIT" val="0"/>
+  <p:tag name="KSO_WM_UNIT_LAYERLEVEL" val="1"/>
+</p:tagLst>
+</file>
+
+<file path=ppt/tags/tag9.xml><?xml version="1.0" encoding="utf-8"?>
+<p:tagLst xmlns:p="http://schemas.openxmlformats.org/presentationml/2006/main">
+  <p:tag name="KSO_WM_UNIT_TYPE" val="i"/>
+  <p:tag name="KSO_WM_UNIT_INDEX" val="1"/>
+  <p:tag name="KSO_WM_BEAUTIFY_FLAG" val="#wm#"/>
+  <p:tag name="KSO_WM_TAG_VERSION" val="3.0"/>
+  <p:tag name="KSO_WM_UNIT_ID" val="_0*i*1"/>
   <p:tag name="KSO_WM_UNIT_ISNUMDGMTITLE" val="0"/>
   <p:tag name="KSO_WM_UNIT_NOCLEAR" val="0"/>
   <p:tag name="KSO_WM_UNIT_HIGHLIGHT" val="0"/>

--- a/模版.pptx
+++ b/模版.pptx
@@ -1614,6 +1614,1034 @@
               <a:ea typeface="汉仪古隶简" panose="00020600040101010101" charset="-122"/>
               <a:cs typeface="+mn-cs"/>
               <a:sym typeface="汉仪古隶简" panose="00020600040101010101" charset="-122"/>
+            </a:endParaRPr>
+          </a:p>
+        </p:txBody>
+      </p:sp>
+      <p:sp>
+        <p:nvSpPr>
+          <p:cNvPr id="22" name="日期占位符 21"/>
+          <p:cNvSpPr>
+            <a:spLocks noGrp="1"/>
+          </p:cNvSpPr>
+          <p:nvPr>
+            <p:ph type="dt" sz="half" idx="10"/>
+            <p:custDataLst>
+              <p:tags r:id="rId12"/>
+            </p:custDataLst>
+          </p:nvPr>
+        </p:nvSpPr>
+        <p:spPr/>
+        <p:txBody>
+          <a:bodyPr wrap="square">
+            <a:normAutofit/>
+          </a:bodyPr>
+          <a:lstStyle>
+            <a:lvl1pPr>
+              <a:defRPr>
+                <a:latin typeface="汉仪古隶简" panose="00020600040101010101" charset="-122"/>
+                <a:ea typeface="汉仪古隶简" panose="00020600040101010101" charset="-122"/>
+                <a:sym typeface="汉仪古隶简" panose="00020600040101010101" charset="-122"/>
+              </a:defRPr>
+            </a:lvl1pPr>
+          </a:lstStyle>
+          <a:p>
+            <a:fld id="{5592522B-0F24-4480-B9DD-A9474A6880D6}" type="datetimeFigureOut">
+              <a:rPr lang="zh-CN" altLang="en-US" smtClean="0"/>
+            </a:fld>
+            <a:endParaRPr lang="zh-CN" altLang="en-US"/>
+          </a:p>
+        </p:txBody>
+      </p:sp>
+      <p:sp>
+        <p:nvSpPr>
+          <p:cNvPr id="23" name="页脚占位符 22"/>
+          <p:cNvSpPr>
+            <a:spLocks noGrp="1"/>
+          </p:cNvSpPr>
+          <p:nvPr>
+            <p:ph type="ftr" sz="quarter" idx="11"/>
+            <p:custDataLst>
+              <p:tags r:id="rId13"/>
+            </p:custDataLst>
+          </p:nvPr>
+        </p:nvSpPr>
+        <p:spPr/>
+        <p:txBody>
+          <a:bodyPr>
+            <a:normAutofit/>
+          </a:bodyPr>
+          <a:lstStyle>
+            <a:lvl1pPr>
+              <a:defRPr>
+                <a:latin typeface="汉仪古隶简" panose="00020600040101010101" charset="-122"/>
+                <a:ea typeface="汉仪古隶简" panose="00020600040101010101" charset="-122"/>
+                <a:sym typeface="汉仪古隶简" panose="00020600040101010101" charset="-122"/>
+              </a:defRPr>
+            </a:lvl1pPr>
+          </a:lstStyle>
+          <a:p>
+            <a:endParaRPr lang="zh-CN" altLang="en-US" dirty="0"/>
+          </a:p>
+        </p:txBody>
+      </p:sp>
+      <p:sp>
+        <p:nvSpPr>
+          <p:cNvPr id="24" name="灯片编号占位符 23"/>
+          <p:cNvSpPr>
+            <a:spLocks noGrp="1"/>
+          </p:cNvSpPr>
+          <p:nvPr>
+            <p:ph type="sldNum" sz="quarter" idx="12"/>
+            <p:custDataLst>
+              <p:tags r:id="rId14"/>
+            </p:custDataLst>
+          </p:nvPr>
+        </p:nvSpPr>
+        <p:spPr>
+          <a:xfrm>
+            <a:off x="6457950" y="8475133"/>
+            <a:ext cx="2057400" cy="486833"/>
+          </a:xfrm>
+        </p:spPr>
+        <p:txBody>
+          <a:bodyPr wrap="square">
+            <a:normAutofit/>
+          </a:bodyPr>
+          <a:lstStyle>
+            <a:lvl1pPr>
+              <a:defRPr>
+                <a:latin typeface="汉仪古隶简" panose="00020600040101010101" charset="-122"/>
+                <a:ea typeface="汉仪古隶简" panose="00020600040101010101" charset="-122"/>
+                <a:sym typeface="汉仪古隶简" panose="00020600040101010101" charset="-122"/>
+              </a:defRPr>
+            </a:lvl1pPr>
+          </a:lstStyle>
+          <a:p>
+            <a:fld id="{BE5F26B5-172A-4DC2-B0B7-181CFC56B87C}" type="slidenum">
+              <a:rPr lang="zh-CN" altLang="en-US" smtClean="0"/>
+            </a:fld>
+            <a:endParaRPr lang="zh-CN" altLang="en-US"/>
+          </a:p>
+        </p:txBody>
+      </p:sp>
+      <p:pic>
+        <p:nvPicPr>
+          <p:cNvPr id="25" name="图片 24" descr="生成海报"/>
+          <p:cNvPicPr>
+            <a:picLocks noChangeAspect="1"/>
+          </p:cNvPicPr>
+          <p:nvPr userDrawn="1">
+            <p:custDataLst>
+              <p:tags r:id="rId15"/>
+            </p:custDataLst>
+          </p:nvPr>
+        </p:nvPicPr>
+        <p:blipFill>
+          <a:blip r:embed="rId16" cstate="email">
+            <a:lum bright="6000"/>
+          </a:blip>
+          <a:srcRect/>
+          <a:stretch>
+            <a:fillRect/>
+          </a:stretch>
+        </p:blipFill>
+        <p:spPr>
+          <a:xfrm>
+            <a:off x="0" y="5899573"/>
+            <a:ext cx="9141714" cy="3244427"/>
+          </a:xfrm>
+          <a:custGeom>
+            <a:avLst/>
+            <a:gdLst>
+              <a:gd name="connsiteX0" fmla="*/ 0 w 12188952"/>
+              <a:gd name="connsiteY0" fmla="*/ 0 h 2433320"/>
+              <a:gd name="connsiteX1" fmla="*/ 12188952 w 12188952"/>
+              <a:gd name="connsiteY1" fmla="*/ 0 h 2433320"/>
+              <a:gd name="connsiteX2" fmla="*/ 12188952 w 12188952"/>
+              <a:gd name="connsiteY2" fmla="*/ 2433320 h 2433320"/>
+              <a:gd name="connsiteX3" fmla="*/ 0 w 12188952"/>
+              <a:gd name="connsiteY3" fmla="*/ 2433320 h 2433320"/>
+            </a:gdLst>
+            <a:ahLst/>
+            <a:cxnLst>
+              <a:cxn ang="0">
+                <a:pos x="connsiteX0" y="connsiteY0"/>
+              </a:cxn>
+              <a:cxn ang="0">
+                <a:pos x="connsiteX1" y="connsiteY1"/>
+              </a:cxn>
+              <a:cxn ang="0">
+                <a:pos x="connsiteX2" y="connsiteY2"/>
+              </a:cxn>
+              <a:cxn ang="0">
+                <a:pos x="connsiteX3" y="connsiteY3"/>
+              </a:cxn>
+            </a:cxnLst>
+            <a:rect l="l" t="t" r="r" b="b"/>
+            <a:pathLst>
+              <a:path w="12188952" h="2433320">
+                <a:moveTo>
+                  <a:pt x="0" y="0"/>
+                </a:moveTo>
+                <a:lnTo>
+                  <a:pt x="12188952" y="0"/>
+                </a:lnTo>
+                <a:lnTo>
+                  <a:pt x="12188952" y="2433320"/>
+                </a:lnTo>
+                <a:lnTo>
+                  <a:pt x="0" y="2433320"/>
+                </a:lnTo>
+                <a:close/>
+              </a:path>
+            </a:pathLst>
+          </a:custGeom>
+        </p:spPr>
+      </p:pic>
+      <p:sp>
+        <p:nvSpPr>
+          <p:cNvPr id="26" name="任意多边形: 形状 13"/>
+          <p:cNvSpPr/>
+          <p:nvPr userDrawn="1">
+            <p:custDataLst>
+              <p:tags r:id="rId17"/>
+            </p:custDataLst>
+          </p:nvPr>
+        </p:nvSpPr>
+        <p:spPr>
+          <a:xfrm flipH="1">
+            <a:off x="7117871" y="4359996"/>
+            <a:ext cx="1950388" cy="1509239"/>
+          </a:xfrm>
+          <a:custGeom>
+            <a:avLst/>
+            <a:gdLst>
+              <a:gd name="connsiteX0" fmla="*/ 226049 w 1658514"/>
+              <a:gd name="connsiteY0" fmla="*/ 4 h 721903"/>
+              <a:gd name="connsiteX1" fmla="*/ 78983 w 1658514"/>
+              <a:gd name="connsiteY1" fmla="*/ 114208 h 721903"/>
+              <a:gd name="connsiteX2" fmla="*/ 502846 w 1658514"/>
+              <a:gd name="connsiteY2" fmla="*/ 205172 h 721903"/>
+              <a:gd name="connsiteX3" fmla="*/ 1296469 w 1658514"/>
+              <a:gd name="connsiteY3" fmla="*/ 358048 h 721903"/>
+              <a:gd name="connsiteX4" fmla="*/ 1120351 w 1658514"/>
+              <a:gd name="connsiteY4" fmla="*/ 510925 h 721903"/>
+              <a:gd name="connsiteX5" fmla="*/ 1010052 w 1658514"/>
+              <a:gd name="connsiteY5" fmla="*/ 570932 h 721903"/>
+              <a:gd name="connsiteX6" fmla="*/ 1236556 w 1658514"/>
+              <a:gd name="connsiteY6" fmla="*/ 661896 h 721903"/>
+              <a:gd name="connsiteX7" fmla="*/ 1658514 w 1658514"/>
+              <a:gd name="connsiteY7" fmla="*/ 721904 h 721903"/>
+              <a:gd name="connsiteX8" fmla="*/ 1426199 w 1658514"/>
+              <a:gd name="connsiteY8" fmla="*/ 679327 h 721903"/>
+              <a:gd name="connsiteX9" fmla="*/ 928708 w 1658514"/>
+              <a:gd name="connsiteY9" fmla="*/ 648371 h 721903"/>
+              <a:gd name="connsiteX10" fmla="*/ 998431 w 1658514"/>
+              <a:gd name="connsiteY10" fmla="*/ 470253 h 721903"/>
+              <a:gd name="connsiteX11" fmla="*/ 1161023 w 1658514"/>
+              <a:gd name="connsiteY11" fmla="*/ 365764 h 721903"/>
+              <a:gd name="connsiteX12" fmla="*/ 615145 w 1658514"/>
+              <a:gd name="connsiteY12" fmla="*/ 247654 h 721903"/>
+              <a:gd name="connsiteX13" fmla="*/ 11260 w 1658514"/>
+              <a:gd name="connsiteY13" fmla="*/ 177931 h 721903"/>
+              <a:gd name="connsiteX14" fmla="*/ 226049 w 1658514"/>
+              <a:gd name="connsiteY14" fmla="*/ 4 h 721903"/>
+            </a:gdLst>
+            <a:ahLst/>
+            <a:cxnLst>
+              <a:cxn ang="0">
+                <a:pos x="connsiteX0" y="connsiteY0"/>
+              </a:cxn>
+              <a:cxn ang="0">
+                <a:pos x="connsiteX1" y="connsiteY1"/>
+              </a:cxn>
+              <a:cxn ang="0">
+                <a:pos x="connsiteX2" y="connsiteY2"/>
+              </a:cxn>
+              <a:cxn ang="0">
+                <a:pos x="connsiteX3" y="connsiteY3"/>
+              </a:cxn>
+              <a:cxn ang="0">
+                <a:pos x="connsiteX4" y="connsiteY4"/>
+              </a:cxn>
+              <a:cxn ang="0">
+                <a:pos x="connsiteX5" y="connsiteY5"/>
+              </a:cxn>
+              <a:cxn ang="0">
+                <a:pos x="connsiteX6" y="connsiteY6"/>
+              </a:cxn>
+              <a:cxn ang="0">
+                <a:pos x="connsiteX7" y="connsiteY7"/>
+              </a:cxn>
+              <a:cxn ang="0">
+                <a:pos x="connsiteX8" y="connsiteY8"/>
+              </a:cxn>
+              <a:cxn ang="0">
+                <a:pos x="connsiteX9" y="connsiteY9"/>
+              </a:cxn>
+              <a:cxn ang="0">
+                <a:pos x="connsiteX10" y="connsiteY10"/>
+              </a:cxn>
+              <a:cxn ang="0">
+                <a:pos x="connsiteX11" y="connsiteY11"/>
+              </a:cxn>
+              <a:cxn ang="0">
+                <a:pos x="connsiteX12" y="connsiteY12"/>
+              </a:cxn>
+              <a:cxn ang="0">
+                <a:pos x="connsiteX13" y="connsiteY13"/>
+              </a:cxn>
+              <a:cxn ang="0">
+                <a:pos x="connsiteX14" y="connsiteY14"/>
+              </a:cxn>
+            </a:cxnLst>
+            <a:rect l="l" t="t" r="r" b="b"/>
+            <a:pathLst>
+              <a:path w="1658514" h="721903">
+                <a:moveTo>
+                  <a:pt x="226049" y="4"/>
+                </a:moveTo>
+                <a:cubicBezTo>
+                  <a:pt x="235955" y="-282"/>
+                  <a:pt x="63457" y="15530"/>
+                  <a:pt x="78983" y="114208"/>
+                </a:cubicBezTo>
+                <a:cubicBezTo>
+                  <a:pt x="94509" y="212888"/>
+                  <a:pt x="286057" y="207077"/>
+                  <a:pt x="502846" y="205172"/>
+                </a:cubicBezTo>
+                <a:cubicBezTo>
+                  <a:pt x="719635" y="203267"/>
+                  <a:pt x="1232556" y="183836"/>
+                  <a:pt x="1296469" y="358048"/>
+                </a:cubicBezTo>
+                <a:cubicBezTo>
+                  <a:pt x="1342189" y="482731"/>
+                  <a:pt x="1189979" y="512925"/>
+                  <a:pt x="1120351" y="510925"/>
+                </a:cubicBezTo>
+                <a:cubicBezTo>
+                  <a:pt x="1066059" y="509401"/>
+                  <a:pt x="1010052" y="522545"/>
+                  <a:pt x="1010052" y="570932"/>
+                </a:cubicBezTo>
+                <a:cubicBezTo>
+                  <a:pt x="1010052" y="619319"/>
+                  <a:pt x="1101016" y="654181"/>
+                  <a:pt x="1236556" y="661896"/>
+                </a:cubicBezTo>
+                <a:cubicBezTo>
+                  <a:pt x="1372002" y="669611"/>
+                  <a:pt x="1588791" y="661896"/>
+                  <a:pt x="1658514" y="721904"/>
+                </a:cubicBezTo>
+                <a:cubicBezTo>
+                  <a:pt x="1658514" y="721904"/>
+                  <a:pt x="1567550" y="683232"/>
+                  <a:pt x="1426199" y="679327"/>
+                </a:cubicBezTo>
+                <a:cubicBezTo>
+                  <a:pt x="1292659" y="675707"/>
+                  <a:pt x="1017767" y="704473"/>
+                  <a:pt x="928708" y="648371"/>
+                </a:cubicBezTo>
+                <a:cubicBezTo>
+                  <a:pt x="839650" y="592268"/>
+                  <a:pt x="888037" y="470253"/>
+                  <a:pt x="998431" y="470253"/>
+                </a:cubicBezTo>
+                <a:cubicBezTo>
+                  <a:pt x="1108826" y="470253"/>
+                  <a:pt x="1185502" y="437868"/>
+                  <a:pt x="1161023" y="365764"/>
+                </a:cubicBezTo>
+                <a:cubicBezTo>
+                  <a:pt x="1122352" y="251559"/>
+                  <a:pt x="826124" y="241844"/>
+                  <a:pt x="615145" y="247654"/>
+                </a:cubicBezTo>
+                <a:cubicBezTo>
+                  <a:pt x="404167" y="253464"/>
+                  <a:pt x="65458" y="303756"/>
+                  <a:pt x="11260" y="177931"/>
+                </a:cubicBezTo>
+                <a:cubicBezTo>
+                  <a:pt x="-42937" y="52106"/>
+                  <a:pt x="109939" y="3909"/>
+                  <a:pt x="226049" y="4"/>
+                </a:cubicBezTo>
+                <a:close/>
+              </a:path>
+            </a:pathLst>
+          </a:custGeom>
+          <a:gradFill>
+            <a:gsLst>
+              <a:gs pos="20000">
+                <a:schemeClr val="accent1">
+                  <a:lumMod val="20000"/>
+                  <a:lumOff val="80000"/>
+                </a:schemeClr>
+              </a:gs>
+              <a:gs pos="100000">
+                <a:schemeClr val="accent1">
+                  <a:lumMod val="10000"/>
+                  <a:lumOff val="90000"/>
+                </a:schemeClr>
+              </a:gs>
+            </a:gsLst>
+            <a:lin ang="5400000" scaled="1"/>
+          </a:gradFill>
+          <a:ln w="2858" cap="rnd">
+            <a:noFill/>
+            <a:prstDash val="solid"/>
+            <a:round/>
+          </a:ln>
+        </p:spPr>
+        <p:txBody>
+          <a:bodyPr rtlCol="0" anchor="ctr">
+            <a:noAutofit/>
+          </a:bodyPr>
+          <a:lstStyle/>
+          <a:p>
+            <a:pPr lvl="0" algn="l" defTabSz="914400">
+              <a:spcBef>
+                <a:spcPct val="0"/>
+              </a:spcBef>
+              <a:spcAft>
+                <a:spcPct val="0"/>
+              </a:spcAft>
+              <a:buClrTx/>
+              <a:buSzTx/>
+              <a:buFontTx/>
+            </a:pPr>
+            <a:endParaRPr lang="zh-CN" altLang="en-US" sz="1350" kern="1200" dirty="0">
+              <a:solidFill>
+                <a:schemeClr val="tx1"/>
+              </a:solidFill>
+              <a:latin typeface="汉仪古隶简" panose="00020600040101010101" charset="-122"/>
+              <a:ea typeface="汉仪古隶简" panose="00020600040101010101" charset="-122"/>
+              <a:cs typeface="+mn-cs"/>
+              <a:sym typeface="汉仪古隶简" panose="00020600040101010101" charset="-122"/>
+            </a:endParaRPr>
+          </a:p>
+        </p:txBody>
+      </p:sp>
+      <p:sp>
+        <p:nvSpPr>
+          <p:cNvPr id="27" name="AutoShape 20"/>
+          <p:cNvSpPr/>
+          <p:nvPr userDrawn="1"/>
+        </p:nvSpPr>
+        <p:spPr>
+          <a:xfrm>
+            <a:off x="3810" y="6369050"/>
+            <a:ext cx="9143365" cy="435610"/>
+          </a:xfrm>
+          <a:prstGeom prst="rect">
+            <a:avLst/>
+          </a:prstGeom>
+          <a:noFill/>
+          <a:ln w="12700" cap="flat" cmpd="sng">
+            <a:noFill/>
+            <a:prstDash val="solid"/>
+            <a:round/>
+          </a:ln>
+        </p:spPr>
+        <p:txBody>
+          <a:bodyPr vert="horz" wrap="square" lIns="0" tIns="0" rIns="0" bIns="0" rtlCol="0" anchor="ctr" anchorCtr="0"/>
+          <a:p>
+            <a:pPr indent="0" algn="ctr" defTabSz="914400">
+              <a:lnSpc>
+                <a:spcPct val="125000"/>
+              </a:lnSpc>
+              <a:spcBef>
+                <a:spcPts val="0"/>
+              </a:spcBef>
+              <a:spcAft>
+                <a:spcPts val="0"/>
+              </a:spcAft>
+              <a:defRPr/>
+            </a:pPr>
+            <a:r>
+              <a:rPr lang="en-US" sz="1800" b="0" i="0" u="none" strike="noStrike" kern="0">
+                <a:solidFill>
+                  <a:schemeClr val="tx1"/>
+                </a:solidFill>
+                <a:latin typeface="Noto Sans SC" panose="020B0200000000000000" charset="-122"/>
+                <a:ea typeface="Noto Sans SC" panose="020B0200000000000000" charset="-122"/>
+                <a:cs typeface="Noto Sans SC" panose="020B0200000000000000" charset="-122"/>
+                <a:sym typeface="Noto Sans SC" panose="020B0200000000000000" charset="-122"/>
+              </a:rPr>
+              <a:t>发货方式：</a:t>
+            </a:r>
+            <a:r>
+              <a:rPr lang="zh-CN" altLang="en-US" sz="1800" b="0" i="0" u="none" strike="noStrike" kern="0">
+                <a:solidFill>
+                  <a:schemeClr val="tx1"/>
+                </a:solidFill>
+                <a:latin typeface="Noto Sans SC" panose="020B0200000000000000" charset="-122"/>
+                <a:ea typeface="Noto Sans SC" panose="020B0200000000000000" charset="-122"/>
+                <a:cs typeface="Noto Sans SC" panose="020B0200000000000000" charset="-122"/>
+                <a:sym typeface="Noto Sans SC" panose="020B0200000000000000" charset="-122"/>
+              </a:rPr>
+              <a:t>佰</a:t>
+            </a:r>
+            <a:r>
+              <a:rPr lang="en-US" sz="1800" b="0" i="0" u="none" strike="noStrike" kern="0">
+                <a:solidFill>
+                  <a:schemeClr val="tx1"/>
+                </a:solidFill>
+                <a:latin typeface="Noto Sans SC" panose="020B0200000000000000" charset="-122"/>
+                <a:ea typeface="Noto Sans SC" panose="020B0200000000000000" charset="-122"/>
+                <a:cs typeface="Noto Sans SC" panose="020B0200000000000000" charset="-122"/>
+                <a:sym typeface="Noto Sans SC" panose="020B0200000000000000" charset="-122"/>
+              </a:rPr>
+              <a:t>度网盘 / </a:t>
+            </a:r>
+            <a:r>
+              <a:rPr lang="zh-CN" altLang="en-US" sz="1800" b="0" i="0" u="none" strike="noStrike" kern="0">
+                <a:solidFill>
+                  <a:schemeClr val="tx1"/>
+                </a:solidFill>
+                <a:latin typeface="Noto Sans SC" panose="020B0200000000000000" charset="-122"/>
+                <a:ea typeface="Noto Sans SC" panose="020B0200000000000000" charset="-122"/>
+                <a:cs typeface="Noto Sans SC" panose="020B0200000000000000" charset="-122"/>
+                <a:sym typeface="Noto Sans SC" panose="020B0200000000000000" charset="-122"/>
+              </a:rPr>
+              <a:t>侉</a:t>
+            </a:r>
+            <a:r>
+              <a:rPr lang="en-US" sz="1800" b="0" i="0" u="none" strike="noStrike" kern="0">
+                <a:solidFill>
+                  <a:schemeClr val="tx1"/>
+                </a:solidFill>
+                <a:latin typeface="Noto Sans SC" panose="020B0200000000000000" charset="-122"/>
+                <a:ea typeface="Noto Sans SC" panose="020B0200000000000000" charset="-122"/>
+                <a:cs typeface="Noto Sans SC" panose="020B0200000000000000" charset="-122"/>
+                <a:sym typeface="Noto Sans SC" panose="020B0200000000000000" charset="-122"/>
+              </a:rPr>
+              <a:t>克网盘 秒发</a:t>
+            </a:r>
+            <a:endParaRPr lang="en-US" sz="1800" b="0" i="0" u="none" strike="noStrike" kern="0">
+              <a:solidFill>
+                <a:schemeClr val="tx1"/>
+              </a:solidFill>
+              <a:latin typeface="Noto Sans SC" panose="020B0200000000000000" charset="-122"/>
+              <a:ea typeface="Noto Sans SC" panose="020B0200000000000000" charset="-122"/>
+              <a:cs typeface="Noto Sans SC" panose="020B0200000000000000" charset="-122"/>
+              <a:sym typeface="Noto Sans SC" panose="020B0200000000000000" charset="-122"/>
+            </a:endParaRPr>
+          </a:p>
+        </p:txBody>
+      </p:sp>
+      <p:sp>
+        <p:nvSpPr>
+          <p:cNvPr id="28" name="AutoShape 18"/>
+          <p:cNvSpPr/>
+          <p:nvPr userDrawn="1"/>
+        </p:nvSpPr>
+        <p:spPr>
+          <a:xfrm>
+            <a:off x="3175" y="5685790"/>
+            <a:ext cx="9144000" cy="285750"/>
+          </a:xfrm>
+          <a:prstGeom prst="rect">
+            <a:avLst/>
+          </a:prstGeom>
+          <a:noFill/>
+          <a:ln w="12700" cap="flat" cmpd="sng">
+            <a:noFill/>
+            <a:prstDash val="solid"/>
+            <a:round/>
+          </a:ln>
+        </p:spPr>
+        <p:txBody>
+          <a:bodyPr vert="horz" wrap="square" lIns="0" tIns="0" rIns="0" bIns="0" rtlCol="0" anchor="ctr" anchorCtr="0"/>
+          <a:p>
+            <a:pPr indent="0" algn="ctr" defTabSz="914400">
+              <a:lnSpc>
+                <a:spcPct val="125000"/>
+              </a:lnSpc>
+              <a:spcBef>
+                <a:spcPts val="0"/>
+              </a:spcBef>
+              <a:spcAft>
+                <a:spcPts val="0"/>
+              </a:spcAft>
+              <a:defRPr/>
+            </a:pPr>
+            <a:r>
+              <a:rPr lang="en-US" sz="2800" b="1" i="0" u="none" strike="noStrike" kern="0">
+                <a:solidFill>
+                  <a:schemeClr val="tx1"/>
+                </a:solidFill>
+                <a:latin typeface="Noto Sans SC" panose="020B0200000000000000" charset="-122"/>
+                <a:ea typeface="Noto Sans SC" panose="020B0200000000000000" charset="-122"/>
+                <a:cs typeface="Noto Sans SC" panose="020B0200000000000000" charset="-122"/>
+                <a:sym typeface="Noto Sans SC" panose="020B0200000000000000" charset="-122"/>
+              </a:rPr>
+              <a:t>【</a:t>
+            </a:r>
+            <a:r>
+              <a:rPr lang="zh-CN" altLang="en-US" sz="2800" b="1" i="0" u="none" strike="noStrike" kern="0">
+                <a:solidFill>
+                  <a:schemeClr val="tx1"/>
+                </a:solidFill>
+                <a:latin typeface="Noto Sans SC" panose="020B0200000000000000" charset="-122"/>
+                <a:ea typeface="Noto Sans SC" panose="020B0200000000000000" charset="-122"/>
+                <a:cs typeface="Noto Sans SC" panose="020B0200000000000000" charset="-122"/>
+                <a:sym typeface="Noto Sans SC" panose="020B0200000000000000" charset="-122"/>
+              </a:rPr>
+              <a:t>老</a:t>
+            </a:r>
+            <a:r>
+              <a:rPr lang="en-US" altLang="zh-CN" sz="2800" b="1" i="0" u="none" strike="noStrike" kern="0">
+                <a:solidFill>
+                  <a:schemeClr val="tx1"/>
+                </a:solidFill>
+                <a:latin typeface="Noto Sans SC" panose="020B0200000000000000" charset="-122"/>
+                <a:ea typeface="Noto Sans SC" panose="020B0200000000000000" charset="-122"/>
+                <a:cs typeface="Noto Sans SC" panose="020B0200000000000000" charset="-122"/>
+                <a:sym typeface="Noto Sans SC" panose="020B0200000000000000" charset="-122"/>
+              </a:rPr>
+              <a:t>D</a:t>
+            </a:r>
+            <a:r>
+              <a:rPr lang="zh-CN" altLang="en-US" sz="2800" b="1" i="0" u="none" strike="noStrike" kern="0">
+                <a:solidFill>
+                  <a:schemeClr val="tx1"/>
+                </a:solidFill>
+                <a:latin typeface="Noto Sans SC" panose="020B0200000000000000" charset="-122"/>
+                <a:ea typeface="Noto Sans SC" panose="020B0200000000000000" charset="-122"/>
+                <a:cs typeface="Noto Sans SC" panose="020B0200000000000000" charset="-122"/>
+                <a:sym typeface="Noto Sans SC" panose="020B0200000000000000" charset="-122"/>
+              </a:rPr>
+              <a:t>的小铺</a:t>
+            </a:r>
+            <a:r>
+              <a:rPr lang="en-US" sz="2800" b="1" i="0" u="none" strike="noStrike" kern="0">
+                <a:solidFill>
+                  <a:schemeClr val="tx1"/>
+                </a:solidFill>
+                <a:latin typeface="Noto Sans SC" panose="020B0200000000000000" charset="-122"/>
+                <a:ea typeface="Noto Sans SC" panose="020B0200000000000000" charset="-122"/>
+                <a:cs typeface="Noto Sans SC" panose="020B0200000000000000" charset="-122"/>
+                <a:sym typeface="Noto Sans SC" panose="020B0200000000000000" charset="-122"/>
+              </a:rPr>
+              <a:t>】</a:t>
+            </a:r>
+            <a:endParaRPr lang="en-US" sz="2800" b="1" i="0" u="none" strike="noStrike" kern="0">
+              <a:solidFill>
+                <a:schemeClr val="tx1"/>
+              </a:solidFill>
+              <a:latin typeface="Noto Sans SC" panose="020B0200000000000000" charset="-122"/>
+              <a:ea typeface="Noto Sans SC" panose="020B0200000000000000" charset="-122"/>
+              <a:cs typeface="Noto Sans SC" panose="020B0200000000000000" charset="-122"/>
+              <a:sym typeface="Noto Sans SC" panose="020B0200000000000000" charset="-122"/>
+            </a:endParaRPr>
+          </a:p>
+        </p:txBody>
+      </p:sp>
+      <p:sp>
+        <p:nvSpPr>
+          <p:cNvPr id="29" name="AutoShape 4"/>
+          <p:cNvSpPr/>
+          <p:nvPr userDrawn="1"/>
+        </p:nvSpPr>
+        <p:spPr>
+          <a:xfrm>
+            <a:off x="3810" y="7202170"/>
+            <a:ext cx="9144000" cy="321310"/>
+          </a:xfrm>
+          <a:prstGeom prst="rect">
+            <a:avLst/>
+          </a:prstGeom>
+          <a:noFill/>
+          <a:ln w="12700" cap="flat" cmpd="sng">
+            <a:noFill/>
+            <a:prstDash val="solid"/>
+            <a:round/>
+          </a:ln>
+        </p:spPr>
+        <p:txBody>
+          <a:bodyPr vert="horz" wrap="square" lIns="0" tIns="0" rIns="0" bIns="0" rtlCol="0" anchor="ctr" anchorCtr="0"/>
+          <a:p>
+            <a:pPr indent="0" algn="ctr" defTabSz="914400">
+              <a:lnSpc>
+                <a:spcPct val="125000"/>
+              </a:lnSpc>
+              <a:spcBef>
+                <a:spcPts val="0"/>
+              </a:spcBef>
+              <a:spcAft>
+                <a:spcPts val="0"/>
+              </a:spcAft>
+              <a:defRPr/>
+            </a:pPr>
+            <a:r>
+              <a:rPr lang="zh-CN" altLang="en-US" sz="1800" b="0" i="0" u="none" strike="noStrike" kern="0">
+                <a:solidFill>
+                  <a:schemeClr val="tx1"/>
+                </a:solidFill>
+                <a:latin typeface="Noto Sans SC" panose="020B0200000000000000" charset="-122"/>
+                <a:ea typeface="Noto Sans SC" panose="020B0200000000000000" charset="-122"/>
+                <a:cs typeface="Noto Sans SC" panose="020B0200000000000000" charset="-122"/>
+                <a:sym typeface="Noto Sans SC" panose="020B0200000000000000" charset="-122"/>
+              </a:rPr>
+              <a:t>可代找电子资源</a:t>
+            </a:r>
+            <a:endParaRPr lang="zh-CN" altLang="en-US" sz="1800" b="0" i="0" u="none" strike="noStrike" kern="0">
+              <a:solidFill>
+                <a:schemeClr val="tx1"/>
+              </a:solidFill>
+              <a:latin typeface="Noto Sans SC" panose="020B0200000000000000" charset="-122"/>
+              <a:ea typeface="Noto Sans SC" panose="020B0200000000000000" charset="-122"/>
+              <a:cs typeface="Noto Sans SC" panose="020B0200000000000000" charset="-122"/>
+              <a:sym typeface="Noto Sans SC" panose="020B0200000000000000" charset="-122"/>
+            </a:endParaRPr>
+          </a:p>
+        </p:txBody>
+      </p:sp>
+      <p:sp>
+        <p:nvSpPr>
+          <p:cNvPr id="30" name="文本框 29"/>
+          <p:cNvSpPr txBox="1"/>
+          <p:nvPr userDrawn="1"/>
+        </p:nvSpPr>
+        <p:spPr>
+          <a:xfrm>
+            <a:off x="3175" y="3787775"/>
+            <a:ext cx="9144000" cy="706755"/>
+          </a:xfrm>
+          <a:prstGeom prst="rect">
+            <a:avLst/>
+          </a:prstGeom>
+          <a:noFill/>
+        </p:spPr>
+        <p:txBody>
+          <a:bodyPr wrap="square" rtlCol="0">
+            <a:spAutoFit/>
+          </a:bodyPr>
+          <a:p>
+            <a:pPr algn="ctr"/>
+            <a:r>
+              <a:rPr lang="en-US" altLang="zh-CN" sz="4000"/>
+              <a:t>e</a:t>
+            </a:r>
+            <a:r>
+              <a:rPr lang="en-US" altLang="zh-CN" sz="4000">
+                <a:sym typeface="+mn-ea"/>
+              </a:rPr>
+              <a:t>p</a:t>
+            </a:r>
+            <a:r>
+              <a:rPr lang="en-US" altLang="zh-CN" sz="4000"/>
+              <a:t>ub</a:t>
+            </a:r>
+            <a:r>
+              <a:rPr lang="zh-CN" altLang="en-US" sz="4000"/>
+              <a:t>、</a:t>
+            </a:r>
+            <a:r>
+              <a:rPr lang="en-US" altLang="zh-CN" sz="4000"/>
+              <a:t>pdf</a:t>
+            </a:r>
+            <a:r>
+              <a:rPr lang="zh-CN" altLang="en-US" sz="4000"/>
+              <a:t>、</a:t>
+            </a:r>
+            <a:r>
+              <a:rPr lang="en-US" altLang="zh-CN" sz="4000"/>
+              <a:t>azw3</a:t>
+            </a:r>
+            <a:r>
+              <a:rPr lang="zh-CN" altLang="en-US" sz="4000"/>
+              <a:t>、</a:t>
+            </a:r>
+            <a:r>
+              <a:rPr lang="en-US" altLang="zh-CN" sz="4000"/>
+              <a:t>mobi</a:t>
+            </a:r>
+            <a:r>
+              <a:rPr lang="zh-CN" altLang="en-US" sz="4000">
+                <a:ea typeface="宋体" panose="02010600030101010101" pitchFamily="2" charset="-122"/>
+              </a:rPr>
+              <a:t>、</a:t>
+            </a:r>
+            <a:r>
+              <a:rPr lang="en-US" altLang="zh-CN" sz="4000">
+                <a:ea typeface="宋体" panose="02010600030101010101" pitchFamily="2" charset="-122"/>
+              </a:rPr>
+              <a:t>docx</a:t>
+            </a:r>
+            <a:r>
+              <a:rPr lang="zh-CN" altLang="en-US" sz="4000">
+                <a:ea typeface="宋体" panose="02010600030101010101" pitchFamily="2" charset="-122"/>
+              </a:rPr>
+              <a:t>、</a:t>
+            </a:r>
+            <a:r>
+              <a:rPr lang="en-US" altLang="zh-CN" sz="4000">
+                <a:ea typeface="宋体" panose="02010600030101010101" pitchFamily="2" charset="-122"/>
+              </a:rPr>
+              <a:t>txt</a:t>
+            </a:r>
+            <a:r>
+              <a:rPr lang="en-US" altLang="zh-CN" sz="4000"/>
+              <a:t> </a:t>
+            </a:r>
+            <a:endParaRPr lang="en-US" altLang="zh-CN" sz="4000"/>
+          </a:p>
+        </p:txBody>
+      </p:sp>
+      <p:sp>
+        <p:nvSpPr>
+          <p:cNvPr id="31" name="副标题"/>
+          <p:cNvSpPr>
+            <a:spLocks noGrp="1"/>
+          </p:cNvSpPr>
+          <p:nvPr userDrawn="1">
+            <p:custDataLst>
+              <p:tags r:id="rId18"/>
+            </p:custDataLst>
+          </p:nvPr>
+        </p:nvSpPr>
+        <p:spPr>
+          <a:xfrm>
+            <a:off x="3175" y="4765040"/>
+            <a:ext cx="9144000" cy="386715"/>
+          </a:xfrm>
+          <a:prstGeom prst="rect">
+            <a:avLst/>
+          </a:prstGeom>
+        </p:spPr>
+        <p:txBody>
+          <a:bodyPr vert="horz" wrap="square" lIns="0" tIns="0" rIns="0" bIns="0" rtlCol="0" anchor="t" anchorCtr="0">
+            <a:noAutofit/>
+          </a:bodyPr>
+          <a:lstStyle>
+            <a:lvl1pPr marL="0" indent="0" algn="ctr" defTabSz="914400" rtl="0" eaLnBrk="1" latinLnBrk="0" hangingPunct="1">
+              <a:lnSpc>
+                <a:spcPct val="100000"/>
+              </a:lnSpc>
+              <a:spcBef>
+                <a:spcPts val="1000"/>
+              </a:spcBef>
+              <a:buFont typeface="Arial" panose="020B0604020202020204" pitchFamily="34" charset="0"/>
+              <a:buNone/>
+              <a:defRPr sz="2400" kern="1200">
+                <a:solidFill>
+                  <a:schemeClr val="accent1">
+                    <a:lumMod val="50000"/>
+                  </a:schemeClr>
+                </a:solidFill>
+                <a:latin typeface="汉仪古隶简" panose="00020600040101010101" charset="-122"/>
+                <a:ea typeface="汉仪古隶简" panose="00020600040101010101" charset="-122"/>
+                <a:cs typeface="+mn-cs"/>
+                <a:sym typeface="汉仪古隶简" panose="00020600040101010101" charset="-122"/>
+              </a:defRPr>
+            </a:lvl1pPr>
+            <a:lvl2pPr marL="457200" indent="0" algn="ctr" defTabSz="914400" rtl="0" eaLnBrk="1" latinLnBrk="0" hangingPunct="1">
+              <a:lnSpc>
+                <a:spcPct val="130000"/>
+              </a:lnSpc>
+              <a:spcBef>
+                <a:spcPts val="0"/>
+              </a:spcBef>
+              <a:buFont typeface="Arial" panose="020B0604020202020204" pitchFamily="34" charset="0"/>
+              <a:buNone/>
+              <a:defRPr sz="2000" kern="1200">
+                <a:solidFill>
+                  <a:schemeClr val="tx1">
+                    <a:lumMod val="65000"/>
+                    <a:lumOff val="35000"/>
+                  </a:schemeClr>
+                </a:solidFill>
+                <a:latin typeface="汉仪古隶简" panose="00020600040101010101" charset="-122"/>
+                <a:ea typeface="汉仪古隶简" panose="00020600040101010101" charset="-122"/>
+                <a:cs typeface="+mn-cs"/>
+                <a:sym typeface="汉仪古隶简" panose="00020600040101010101" charset="-122"/>
+              </a:defRPr>
+            </a:lvl2pPr>
+            <a:lvl3pPr marL="914400" indent="0" algn="ctr" defTabSz="914400" rtl="0" eaLnBrk="1" latinLnBrk="0" hangingPunct="1">
+              <a:lnSpc>
+                <a:spcPct val="130000"/>
+              </a:lnSpc>
+              <a:spcBef>
+                <a:spcPts val="0"/>
+              </a:spcBef>
+              <a:buFont typeface="Arial" panose="020B0604020202020204" pitchFamily="34" charset="0"/>
+              <a:buNone/>
+              <a:defRPr sz="1800" kern="1200">
+                <a:solidFill>
+                  <a:schemeClr val="tx1">
+                    <a:lumMod val="65000"/>
+                    <a:lumOff val="35000"/>
+                  </a:schemeClr>
+                </a:solidFill>
+                <a:latin typeface="汉仪古隶简" panose="00020600040101010101" charset="-122"/>
+                <a:ea typeface="汉仪古隶简" panose="00020600040101010101" charset="-122"/>
+                <a:cs typeface="+mn-cs"/>
+                <a:sym typeface="汉仪古隶简" panose="00020600040101010101" charset="-122"/>
+              </a:defRPr>
+            </a:lvl3pPr>
+            <a:lvl4pPr marL="1371600" indent="0" algn="ctr" defTabSz="914400" rtl="0" eaLnBrk="1" latinLnBrk="0" hangingPunct="1">
+              <a:lnSpc>
+                <a:spcPct val="130000"/>
+              </a:lnSpc>
+              <a:spcBef>
+                <a:spcPts val="0"/>
+              </a:spcBef>
+              <a:buFont typeface="Arial" panose="020B0604020202020204" pitchFamily="34" charset="0"/>
+              <a:buNone/>
+              <a:defRPr sz="1600" kern="1200">
+                <a:solidFill>
+                  <a:schemeClr val="tx1">
+                    <a:lumMod val="65000"/>
+                    <a:lumOff val="35000"/>
+                  </a:schemeClr>
+                </a:solidFill>
+                <a:latin typeface="汉仪古隶简" panose="00020600040101010101" charset="-122"/>
+                <a:ea typeface="汉仪古隶简" panose="00020600040101010101" charset="-122"/>
+                <a:cs typeface="+mn-cs"/>
+                <a:sym typeface="汉仪古隶简" panose="00020600040101010101" charset="-122"/>
+              </a:defRPr>
+            </a:lvl4pPr>
+            <a:lvl5pPr marL="1828800" indent="0" algn="ctr" defTabSz="914400" rtl="0" eaLnBrk="1" latinLnBrk="0" hangingPunct="1">
+              <a:lnSpc>
+                <a:spcPct val="130000"/>
+              </a:lnSpc>
+              <a:spcBef>
+                <a:spcPts val="0"/>
+              </a:spcBef>
+              <a:buFont typeface="Arial" panose="020B0604020202020204" pitchFamily="34" charset="0"/>
+              <a:buNone/>
+              <a:defRPr sz="1600" kern="1200">
+                <a:solidFill>
+                  <a:schemeClr val="tx1">
+                    <a:lumMod val="65000"/>
+                    <a:lumOff val="35000"/>
+                  </a:schemeClr>
+                </a:solidFill>
+                <a:latin typeface="汉仪古隶简" panose="00020600040101010101" charset="-122"/>
+                <a:ea typeface="汉仪古隶简" panose="00020600040101010101" charset="-122"/>
+                <a:cs typeface="+mn-cs"/>
+                <a:sym typeface="汉仪古隶简" panose="00020600040101010101" charset="-122"/>
+              </a:defRPr>
+            </a:lvl5pPr>
+            <a:lvl6pPr marL="2286000" indent="0" algn="ctr" defTabSz="914400" rtl="0" eaLnBrk="1" latinLnBrk="0" hangingPunct="1">
+              <a:lnSpc>
+                <a:spcPct val="90000"/>
+              </a:lnSpc>
+              <a:spcBef>
+                <a:spcPts val="500"/>
+              </a:spcBef>
+              <a:buFont typeface="Arial" panose="020B0604020202020204" pitchFamily="34" charset="0"/>
+              <a:buNone/>
+              <a:defRPr sz="1600" kern="1200">
+                <a:solidFill>
+                  <a:schemeClr val="tx1"/>
+                </a:solidFill>
+                <a:latin typeface="+mn-lt"/>
+                <a:ea typeface="+mn-ea"/>
+                <a:cs typeface="+mn-cs"/>
+              </a:defRPr>
+            </a:lvl6pPr>
+            <a:lvl7pPr marL="2743200" indent="0" algn="ctr" defTabSz="914400" rtl="0" eaLnBrk="1" latinLnBrk="0" hangingPunct="1">
+              <a:lnSpc>
+                <a:spcPct val="90000"/>
+              </a:lnSpc>
+              <a:spcBef>
+                <a:spcPts val="500"/>
+              </a:spcBef>
+              <a:buFont typeface="Arial" panose="020B0604020202020204" pitchFamily="34" charset="0"/>
+              <a:buNone/>
+              <a:defRPr sz="1600" kern="1200">
+                <a:solidFill>
+                  <a:schemeClr val="tx1"/>
+                </a:solidFill>
+                <a:latin typeface="+mn-lt"/>
+                <a:ea typeface="+mn-ea"/>
+                <a:cs typeface="+mn-cs"/>
+              </a:defRPr>
+            </a:lvl7pPr>
+            <a:lvl8pPr marL="3200400" indent="0" algn="ctr" defTabSz="914400" rtl="0" eaLnBrk="1" latinLnBrk="0" hangingPunct="1">
+              <a:lnSpc>
+                <a:spcPct val="90000"/>
+              </a:lnSpc>
+              <a:spcBef>
+                <a:spcPts val="500"/>
+              </a:spcBef>
+              <a:buFont typeface="Arial" panose="020B0604020202020204" pitchFamily="34" charset="0"/>
+              <a:buNone/>
+              <a:defRPr sz="1600" kern="1200">
+                <a:solidFill>
+                  <a:schemeClr val="tx1"/>
+                </a:solidFill>
+                <a:latin typeface="+mn-lt"/>
+                <a:ea typeface="+mn-ea"/>
+                <a:cs typeface="+mn-cs"/>
+              </a:defRPr>
+            </a:lvl8pPr>
+            <a:lvl9pPr marL="3657600" indent="0" algn="ctr" defTabSz="914400" rtl="0" eaLnBrk="1" latinLnBrk="0" hangingPunct="1">
+              <a:lnSpc>
+                <a:spcPct val="90000"/>
+              </a:lnSpc>
+              <a:spcBef>
+                <a:spcPts val="500"/>
+              </a:spcBef>
+              <a:buFont typeface="Arial" panose="020B0604020202020204" pitchFamily="34" charset="0"/>
+              <a:buNone/>
+              <a:defRPr sz="1600" kern="1200">
+                <a:solidFill>
+                  <a:schemeClr val="tx1"/>
+                </a:solidFill>
+                <a:latin typeface="+mn-lt"/>
+                <a:ea typeface="+mn-ea"/>
+                <a:cs typeface="+mn-cs"/>
+              </a:defRPr>
+            </a:lvl9pPr>
+          </a:lstStyle>
+          <a:p>
+            <a:pPr algn="ctr"/>
+            <a:r>
+              <a:rPr lang="zh-CN" sz="3600" b="1">
+                <a:latin typeface="黑体" panose="02010609060101010101" charset="-122"/>
+                <a:ea typeface="黑体" panose="02010609060101010101" charset="-122"/>
+                <a:cs typeface="黑体" panose="02010609060101010101" charset="-122"/>
+              </a:rPr>
+              <a:t>高清电子书</a:t>
+            </a:r>
+            <a:r>
+              <a:rPr lang="en-US" altLang="zh-CN" sz="3600" b="1">
+                <a:latin typeface="黑体" panose="02010609060101010101" charset="-122"/>
+                <a:ea typeface="黑体" panose="02010609060101010101" charset="-122"/>
+                <a:cs typeface="黑体" panose="02010609060101010101" charset="-122"/>
+              </a:rPr>
+              <a:t>-</a:t>
+            </a:r>
+            <a:r>
+              <a:rPr lang="zh-CN" altLang="en-US" sz="3600" b="1">
+                <a:latin typeface="黑体" panose="02010609060101010101" charset="-122"/>
+                <a:ea typeface="黑体" panose="02010609060101010101" charset="-122"/>
+                <a:cs typeface="黑体" panose="02010609060101010101" charset="-122"/>
+              </a:rPr>
+              <a:t>精排</a:t>
+            </a:r>
+            <a:r>
+              <a:rPr lang="zh-CN" sz="3600" b="1">
+                <a:latin typeface="黑体" panose="02010609060101010101" charset="-122"/>
+                <a:ea typeface="黑体" panose="02010609060101010101" charset="-122"/>
+                <a:cs typeface="黑体" panose="02010609060101010101" charset="-122"/>
+              </a:rPr>
+              <a:t>非扫描版</a:t>
+            </a:r>
+            <a:endParaRPr lang="zh-CN" sz="3600" b="1">
+              <a:latin typeface="黑体" panose="02010609060101010101" charset="-122"/>
+              <a:ea typeface="黑体" panose="02010609060101010101" charset="-122"/>
+              <a:cs typeface="黑体" panose="02010609060101010101" charset="-122"/>
             </a:endParaRPr>
           </a:p>
         </p:txBody>
@@ -2770,6 +3798,110 @@
 
 <file path=ppt/tags/tag10.xml><?xml version="1.0" encoding="utf-8"?>
 <p:tagLst xmlns:p="http://schemas.openxmlformats.org/presentationml/2006/main">
+  <p:tag name="KSO_WM_UNIT_ID" val="_1**"/>
+  <p:tag name="KSO_WM_BEAUTIFY_FLAG" val="#wm#"/>
+  <p:tag name="KSO_WM_TAG_VERSION" val="3.0"/>
+  <p:tag name="KSO_WM_UNIT_ISNUMDGMTITLE" val="0"/>
+  <p:tag name="KSO_WM_UNIT_NOCLEAR" val="0"/>
+  <p:tag name="KSO_WM_UNIT_HIGHLIGHT" val="0"/>
+  <p:tag name="KSO_WM_UNIT_COMPATIBLE" val="0"/>
+  <p:tag name="KSO_WM_UNIT_DIAGRAM_ISNUMVISUAL" val="0"/>
+  <p:tag name="KSO_WM_UNIT_DIAGRAM_ISREFERUNIT" val="0"/>
+  <p:tag name="KSO_WM_UNIT_LAYERLEVEL" val="1"/>
+</p:tagLst>
+</file>
+
+<file path=ppt/tags/tag11.xml><?xml version="1.0" encoding="utf-8"?>
+<p:tagLst xmlns:p="http://schemas.openxmlformats.org/presentationml/2006/main">
+  <p:tag name="KSO_WM_UNIT_ID" val="_1**"/>
+  <p:tag name="KSO_WM_BEAUTIFY_FLAG" val="#wm#"/>
+  <p:tag name="KSO_WM_TAG_VERSION" val="3.0"/>
+  <p:tag name="KSO_WM_UNIT_ISNUMDGMTITLE" val="0"/>
+  <p:tag name="KSO_WM_UNIT_NOCLEAR" val="0"/>
+  <p:tag name="KSO_WM_UNIT_HIGHLIGHT" val="0"/>
+  <p:tag name="KSO_WM_UNIT_COMPATIBLE" val="0"/>
+  <p:tag name="KSO_WM_UNIT_DIAGRAM_ISNUMVISUAL" val="0"/>
+  <p:tag name="KSO_WM_UNIT_DIAGRAM_ISREFERUNIT" val="0"/>
+  <p:tag name="KSO_WM_UNIT_LAYERLEVEL" val="1"/>
+</p:tagLst>
+</file>
+
+<file path=ppt/tags/tag12.xml><?xml version="1.0" encoding="utf-8"?>
+<p:tagLst xmlns:p="http://schemas.openxmlformats.org/presentationml/2006/main">
+  <p:tag name="KSO_WM_UNIT_TYPE" val="i"/>
+  <p:tag name="KSO_WM_UNIT_INDEX" val="1"/>
+  <p:tag name="KSO_WM_BEAUTIFY_FLAG" val="#wm#"/>
+  <p:tag name="KSO_WM_TAG_VERSION" val="3.0"/>
+  <p:tag name="KSO_WM_UNIT_ID" val="_1*i*1"/>
+  <p:tag name="KSO_WM_UNIT_ISNUMDGMTITLE" val="0"/>
+  <p:tag name="KSO_WM_UNIT_NOCLEAR" val="0"/>
+  <p:tag name="KSO_WM_UNIT_HIGHLIGHT" val="0"/>
+  <p:tag name="KSO_WM_UNIT_COMPATIBLE" val="0"/>
+  <p:tag name="KSO_WM_UNIT_DIAGRAM_ISNUMVISUAL" val="0"/>
+  <p:tag name="KSO_WM_UNIT_DIAGRAM_ISREFERUNIT" val="0"/>
+  <p:tag name="KSO_WM_UNIT_LAYERLEVEL" val="1"/>
+</p:tagLst>
+</file>
+
+<file path=ppt/tags/tag13.xml><?xml version="1.0" encoding="utf-8"?>
+<p:tagLst xmlns:p="http://schemas.openxmlformats.org/presentationml/2006/main">
+  <p:tag name="KSO_WM_UNIT_TYPE" val="i"/>
+  <p:tag name="KSO_WM_UNIT_INDEX" val="8"/>
+  <p:tag name="KSO_WM_BEAUTIFY_FLAG" val="#wm#"/>
+  <p:tag name="KSO_WM_TAG_VERSION" val="3.0"/>
+  <p:tag name="KSO_WM_UNIT_ID" val="_1*i*8"/>
+  <p:tag name="KSO_WM_UNIT_ISNUMDGMTITLE" val="0"/>
+  <p:tag name="KSO_WM_UNIT_NOCLEAR" val="0"/>
+  <p:tag name="KSO_WM_UNIT_HIGHLIGHT" val="0"/>
+  <p:tag name="KSO_WM_UNIT_COMPATIBLE" val="0"/>
+  <p:tag name="KSO_WM_UNIT_DIAGRAM_ISNUMVISUAL" val="0"/>
+  <p:tag name="KSO_WM_UNIT_DIAGRAM_ISREFERUNIT" val="0"/>
+  <p:tag name="KSO_WM_UNIT_LAYERLEVEL" val="1"/>
+</p:tagLst>
+</file>
+
+<file path=ppt/tags/tag14.xml><?xml version="1.0" encoding="utf-8"?>
+<p:tagLst xmlns:p="http://schemas.openxmlformats.org/presentationml/2006/main">
+  <p:tag name="KSO_WM_UNIT_TYPE" val="b"/>
+  <p:tag name="KSO_WM_UNIT_INDEX" val="1"/>
+  <p:tag name="KSO_WM_BEAUTIFY_FLAG" val="#wm#"/>
+  <p:tag name="KSO_WM_TAG_VERSION" val="3.0"/>
+  <p:tag name="KSO_WM_UNIT_ID" val="custom40498660_1*b*1"/>
+  <p:tag name="KSO_WM_UNIT_ISNUMDGMTITLE" val="0"/>
+  <p:tag name="KSO_WM_UNIT_HIGHLIGHT" val="0"/>
+  <p:tag name="KSO_WM_UNIT_COMPATIBLE" val="0"/>
+  <p:tag name="KSO_WM_UNIT_DIAGRAM_ISNUMVISUAL" val="0"/>
+  <p:tag name="KSO_WM_UNIT_DIAGRAM_ISREFERUNIT" val="0"/>
+  <p:tag name="KSO_WM_UNIT_LAYERLEVEL" val="1"/>
+  <p:tag name="KSO_WM_TEMPLATE_INDEX" val="40498660"/>
+  <p:tag name="KSO_WM_TEMPLATE_CATEGORY" val="custom"/>
+  <p:tag name="KSO_WM_UNIT_ISCONTENTSTITLE" val="0"/>
+  <p:tag name="KSO_WM_UNIT_VALUE" val="33"/>
+  <p:tag name="KSO_WM_UNIT_TEXT_TYPE" val="1"/>
+  <p:tag name="KSO_WM_UNIT_NOCLEAR" val="0"/>
+  <p:tag name="KSO_WM_UNIT_PRESET_TEXT" val="单击此处添加副标题"/>
+</p:tagLst>
+</file>
+
+<file path=ppt/tags/tag15.xml><?xml version="1.0" encoding="utf-8"?>
+<p:tagLst xmlns:p="http://schemas.openxmlformats.org/presentationml/2006/main">
+  <p:tag name="KSO_WM_UNIT_TYPE" val="i"/>
+  <p:tag name="KSO_WM_UNIT_INDEX" val="1"/>
+  <p:tag name="KSO_WM_BEAUTIFY_FLAG" val="#wm#"/>
+  <p:tag name="KSO_WM_TAG_VERSION" val="3.0"/>
+  <p:tag name="KSO_WM_UNIT_ID" val="_0*i*1"/>
+  <p:tag name="KSO_WM_UNIT_ISNUMDGMTITLE" val="0"/>
+  <p:tag name="KSO_WM_UNIT_NOCLEAR" val="0"/>
+  <p:tag name="KSO_WM_UNIT_HIGHLIGHT" val="0"/>
+  <p:tag name="KSO_WM_UNIT_COMPATIBLE" val="0"/>
+  <p:tag name="KSO_WM_UNIT_DIAGRAM_ISNUMVISUAL" val="0"/>
+  <p:tag name="KSO_WM_UNIT_DIAGRAM_ISREFERUNIT" val="0"/>
+  <p:tag name="KSO_WM_UNIT_LAYERLEVEL" val="1"/>
+</p:tagLst>
+</file>
+
+<file path=ppt/tags/tag16.xml><?xml version="1.0" encoding="utf-8"?>
+<p:tagLst xmlns:p="http://schemas.openxmlformats.org/presentationml/2006/main">
   <p:tag name="KSO_WM_UNIT_TYPE" val="i"/>
   <p:tag name="KSO_WM_UNIT_INDEX" val="2"/>
   <p:tag name="KSO_WM_BEAUTIFY_FLAG" val="#wm#"/>
@@ -2785,7 +3917,7 @@
 </p:tagLst>
 </file>
 
-<file path=ppt/tags/tag11.xml><?xml version="1.0" encoding="utf-8"?>
+<file path=ppt/tags/tag17.xml><?xml version="1.0" encoding="utf-8"?>
 <p:tagLst xmlns:p="http://schemas.openxmlformats.org/presentationml/2006/main">
   <p:tag name="KSO_WM_UNIT_TYPE" val="i"/>
   <p:tag name="KSO_WM_UNIT_INDEX" val="3"/>
@@ -2802,7 +3934,7 @@
 </p:tagLst>
 </file>
 
-<file path=ppt/tags/tag12.xml><?xml version="1.0" encoding="utf-8"?>
+<file path=ppt/tags/tag18.xml><?xml version="1.0" encoding="utf-8"?>
 <p:tagLst xmlns:p="http://schemas.openxmlformats.org/presentationml/2006/main">
   <p:tag name="KSO_WM_UNIT_TYPE" val="a"/>
   <p:tag name="KSO_WM_UNIT_INDEX" val="1"/>
@@ -2823,7 +3955,7 @@
 </p:tagLst>
 </file>
 
-<file path=ppt/tags/tag13.xml><?xml version="1.0" encoding="utf-8"?>
+<file path=ppt/tags/tag19.xml><?xml version="1.0" encoding="utf-8"?>
 <p:tagLst xmlns:p="http://schemas.openxmlformats.org/presentationml/2006/main">
   <p:tag name="KSO_WM_UNIT_TYPE" val="f"/>
   <p:tag name="KSO_WM_UNIT_SUBTYPE" val="a"/>
@@ -2845,7 +3977,24 @@
 </p:tagLst>
 </file>
 
-<file path=ppt/tags/tag14.xml><?xml version="1.0" encoding="utf-8"?>
+<file path=ppt/tags/tag2.xml><?xml version="1.0" encoding="utf-8"?>
+<p:tagLst xmlns:p="http://schemas.openxmlformats.org/presentationml/2006/main">
+  <p:tag name="KSO_WM_UNIT_TYPE" val="i"/>
+  <p:tag name="KSO_WM_UNIT_INDEX" val="3"/>
+  <p:tag name="KSO_WM_BEAUTIFY_FLAG" val="#wm#"/>
+  <p:tag name="KSO_WM_TAG_VERSION" val="3.0"/>
+  <p:tag name="KSO_WM_UNIT_ID" val="_1*i*3"/>
+  <p:tag name="KSO_WM_UNIT_ISNUMDGMTITLE" val="0"/>
+  <p:tag name="KSO_WM_UNIT_NOCLEAR" val="0"/>
+  <p:tag name="KSO_WM_UNIT_HIGHLIGHT" val="0"/>
+  <p:tag name="KSO_WM_UNIT_COMPATIBLE" val="0"/>
+  <p:tag name="KSO_WM_UNIT_DIAGRAM_ISNUMVISUAL" val="0"/>
+  <p:tag name="KSO_WM_UNIT_DIAGRAM_ISREFERUNIT" val="0"/>
+  <p:tag name="KSO_WM_UNIT_LAYERLEVEL" val="1"/>
+</p:tagLst>
+</file>
+
+<file path=ppt/tags/tag20.xml><?xml version="1.0" encoding="utf-8"?>
 <p:tagLst xmlns:p="http://schemas.openxmlformats.org/presentationml/2006/main">
   <p:tag name="KSO_WM_UNIT_ID" val="_0**"/>
   <p:tag name="KSO_WM_BEAUTIFY_FLAG" val="#wm#"/>
@@ -2860,7 +4009,7 @@
 </p:tagLst>
 </file>
 
-<file path=ppt/tags/tag15.xml><?xml version="1.0" encoding="utf-8"?>
+<file path=ppt/tags/tag21.xml><?xml version="1.0" encoding="utf-8"?>
 <p:tagLst xmlns:p="http://schemas.openxmlformats.org/presentationml/2006/main">
   <p:tag name="KSO_WM_UNIT_ID" val="_0**"/>
   <p:tag name="KSO_WM_BEAUTIFY_FLAG" val="#wm#"/>
@@ -2875,7 +4024,7 @@
 </p:tagLst>
 </file>
 
-<file path=ppt/tags/tag16.xml><?xml version="1.0" encoding="utf-8"?>
+<file path=ppt/tags/tag22.xml><?xml version="1.0" encoding="utf-8"?>
 <p:tagLst xmlns:p="http://schemas.openxmlformats.org/presentationml/2006/main">
   <p:tag name="KSO_WM_UNIT_ID" val="_0**"/>
   <p:tag name="KSO_WM_BEAUTIFY_FLAG" val="#wm#"/>
@@ -2890,7 +4039,7 @@
 </p:tagLst>
 </file>
 
-<file path=ppt/tags/tag17.xml><?xml version="1.0" encoding="utf-8"?>
+<file path=ppt/tags/tag23.xml><?xml version="1.0" encoding="utf-8"?>
 <p:tagLst xmlns:p="http://schemas.openxmlformats.org/presentationml/2006/main">
   <p:tag name="KSO_WM_TEMPLATE_SUBCATEGORY" val="29"/>
   <p:tag name="KSO_WM_TEMPLATE_COLOR_TYPE" val="0"/>
@@ -2903,7 +4052,7 @@
 </p:tagLst>
 </file>
 
-<file path=ppt/tags/tag18.xml><?xml version="1.0" encoding="utf-8"?>
+<file path=ppt/tags/tag24.xml><?xml version="1.0" encoding="utf-8"?>
 <p:tagLst xmlns:p="http://schemas.openxmlformats.org/presentationml/2006/main">
   <p:tag name="KSO_WM_UNIT_TYPE" val="b"/>
   <p:tag name="KSO_WM_UNIT_INDEX" val="1"/>
@@ -2920,23 +4069,6 @@
   <p:tag name="KSO_WM_UNIT_LAYERLEVEL" val="1"/>
   <p:tag name="KSO_WM_UNIT_ISCONTENTSTITLE" val="0"/>
   <p:tag name="KSO_WM_UNIT_VALUE" val="33"/>
-</p:tagLst>
-</file>
-
-<file path=ppt/tags/tag2.xml><?xml version="1.0" encoding="utf-8"?>
-<p:tagLst xmlns:p="http://schemas.openxmlformats.org/presentationml/2006/main">
-  <p:tag name="KSO_WM_UNIT_TYPE" val="i"/>
-  <p:tag name="KSO_WM_UNIT_INDEX" val="3"/>
-  <p:tag name="KSO_WM_BEAUTIFY_FLAG" val="#wm#"/>
-  <p:tag name="KSO_WM_TAG_VERSION" val="3.0"/>
-  <p:tag name="KSO_WM_UNIT_ID" val="_1*i*3"/>
-  <p:tag name="KSO_WM_UNIT_ISNUMDGMTITLE" val="0"/>
-  <p:tag name="KSO_WM_UNIT_NOCLEAR" val="0"/>
-  <p:tag name="KSO_WM_UNIT_HIGHLIGHT" val="0"/>
-  <p:tag name="KSO_WM_UNIT_COMPATIBLE" val="0"/>
-  <p:tag name="KSO_WM_UNIT_DIAGRAM_ISNUMVISUAL" val="0"/>
-  <p:tag name="KSO_WM_UNIT_DIAGRAM_ISREFERUNIT" val="0"/>
-  <p:tag name="KSO_WM_UNIT_LAYERLEVEL" val="1"/>
 </p:tagLst>
 </file>
 
@@ -3050,11 +4182,9 @@
 
 <file path=ppt/tags/tag9.xml><?xml version="1.0" encoding="utf-8"?>
 <p:tagLst xmlns:p="http://schemas.openxmlformats.org/presentationml/2006/main">
-  <p:tag name="KSO_WM_UNIT_TYPE" val="i"/>
-  <p:tag name="KSO_WM_UNIT_INDEX" val="1"/>
+  <p:tag name="KSO_WM_UNIT_ID" val="_1**"/>
   <p:tag name="KSO_WM_BEAUTIFY_FLAG" val="#wm#"/>
   <p:tag name="KSO_WM_TAG_VERSION" val="3.0"/>
-  <p:tag name="KSO_WM_UNIT_ID" val="_0*i*1"/>
   <p:tag name="KSO_WM_UNIT_ISNUMDGMTITLE" val="0"/>
   <p:tag name="KSO_WM_UNIT_NOCLEAR" val="0"/>
   <p:tag name="KSO_WM_UNIT_HIGHLIGHT" val="0"/>
